--- a/docs/valletta_model_concept_2026-10-08_short.pptx
+++ b/docs/valletta_model_concept_2026-10-08_short.pptx
@@ -8,7 +8,7 @@
     <p:notesMasterId r:id="rId11"/>
   </p:notesMasterIdLst>
   <p:sldIdLst>
-    <p:sldId id="265" r:id="rId2"/>
+    <p:sldId id="275" r:id="rId2"/>
     <p:sldId id="257" r:id="rId3"/>
     <p:sldId id="258" r:id="rId4"/>
     <p:sldId id="259" r:id="rId5"/>
@@ -145,7 +145,7 @@
     </p:spTree>
     <p:extLst>
       <p:ext uri="{BB962C8B-B14F-4D97-AF65-F5344CB8AC3E}">
-        <p14:creationId xmlns:p14="http://schemas.microsoft.com/office/powerpoint/2010/main" val="2126196696"/>
+        <p14:creationId xmlns:p14="http://schemas.microsoft.com/office/powerpoint/2010/main" val="988184106"/>
       </p:ext>
     </p:extLst>
   </p:cSld>
@@ -322,7 +322,7 @@
     </p:spTree>
     <p:extLst>
       <p:ext uri="{BB962C8B-B14F-4D97-AF65-F5344CB8AC3E}">
-        <p14:creationId xmlns:p14="http://schemas.microsoft.com/office/powerpoint/2010/main" val="1611358565"/>
+        <p14:creationId xmlns:p14="http://schemas.microsoft.com/office/powerpoint/2010/main" val="1419756532"/>
       </p:ext>
     </p:extLst>
   </p:cSld>
@@ -1740,7 +1740,7 @@
     </p:spTree>
     <p:extLst>
       <p:ext uri="{BB962C8B-B14F-4D97-AF65-F5344CB8AC3E}">
-        <p14:creationId xmlns:p14="http://schemas.microsoft.com/office/powerpoint/2010/main" val="3598248991"/>
+        <p14:creationId xmlns:p14="http://schemas.microsoft.com/office/powerpoint/2010/main" val="4273070046"/>
       </p:ext>
     </p:extLst>
   </p:cSld>
@@ -7401,7 +7401,7 @@
                 <a:ea typeface="Calibri" pitchFamily="34" charset="-122"/>
                 <a:cs typeface="Calibri" pitchFamily="34" charset="-120"/>
               </a:rPr>
-              <a:t>Some 16 h for the two-dimensional sweep and of the order of 45 h on 8 processes for the three-dimensional runs, the latter scaled from the Stagnone configuration and uncertain by a factor of two.</a:t>
+              <a:t>Some 8 h for the two-dimensional sweep and of the order of 45 h on 8 processes for the three-dimensional runs, the latter scaled from the Stagnone configuration and uncertain by a factor of two.</a:t>
             </a:r>
             <a:endParaRPr lang="en-US" sz="1150" dirty="0"/>
           </a:p>
@@ -7543,7 +7543,7 @@
                 <a:ea typeface="Calibri" pitchFamily="34" charset="-122"/>
                 <a:cs typeface="Calibri" pitchFamily="34" charset="-120"/>
               </a:rPr>
-              <a:t>ERA5 does not resolve the atmospheric gravity waves associated with the phenomenon, so a hindcast of individual events is not attempted.</a:t>
+              <a:t>ERA5 does not resolve the atmospheric gravity waves associated with the milgħuba, so the long wave is studied by a sweep of 96 idealised disturbances, while circulation and waves are validated by a conventional hindcast.</a:t>
             </a:r>
             <a:endParaRPr lang="en-US" sz="1400" dirty="0"/>
           </a:p>
@@ -7683,7 +7683,7 @@
                 <a:ea typeface="Calibri" pitchFamily="34" charset="-122"/>
                 <a:cs typeface="Calibri" pitchFamily="34" charset="-120"/>
               </a:rPr>
-              <a:t>A moving pressure disturbance is imposed, and its speed, direction, width and duration are varied.</a:t>
+              <a:t>A moving pressure disturbance is imposed in a two-dimensional barotropic run, over 6 speeds, 8 directions and 2 widths.</a:t>
             </a:r>
             <a:endParaRPr lang="en-US" sz="1250" dirty="0"/>
           </a:p>
@@ -11226,9 +11226,77 @@
           <a:chExt cx="0" cy="0"/>
         </a:xfrm>
       </p:grpSpPr>
+      <p:pic>
+        <p:nvPicPr>
+          <p:cNvPr id="22" name="Picture 21">
+            <a:extLst>
+              <a:ext uri="{FF2B5EF4-FFF2-40B4-BE49-F238E27FC236}">
+                <a16:creationId xmlns:a16="http://schemas.microsoft.com/office/drawing/2014/main" id="{5CF043AA-8B3E-0E0E-EE0D-70C3EC073409}"/>
+              </a:ext>
+            </a:extLst>
+          </p:cNvPr>
+          <p:cNvPicPr>
+            <a:picLocks noChangeAspect="1"/>
+          </p:cNvPicPr>
+          <p:nvPr/>
+        </p:nvPicPr>
+        <p:blipFill>
+          <a:blip r:embed="rId3">
+            <a:duotone>
+              <a:prstClr val="black"/>
+              <a:schemeClr val="accent1">
+                <a:tint val="45000"/>
+                <a:satMod val="400000"/>
+              </a:schemeClr>
+            </a:duotone>
+          </a:blip>
+          <a:srcRect t="25333"/>
+          <a:stretch>
+            <a:fillRect/>
+          </a:stretch>
+        </p:blipFill>
+        <p:spPr>
+          <a:xfrm>
+            <a:off x="0" y="0"/>
+            <a:ext cx="12242447" cy="6858000"/>
+          </a:xfrm>
+          <a:prstGeom prst="rect">
+            <a:avLst/>
+          </a:prstGeom>
+        </p:spPr>
+      </p:pic>
       <p:sp>
         <p:nvSpPr>
           <p:cNvPr id="2" name="Shape 0"/>
+          <p:cNvSpPr/>
+          <p:nvPr/>
+        </p:nvSpPr>
+        <p:spPr>
+          <a:xfrm>
+            <a:off x="0" y="0"/>
+            <a:ext cx="12188952" cy="6858000"/>
+          </a:xfrm>
+          <a:prstGeom prst="rect">
+            <a:avLst/>
+          </a:prstGeom>
+          <a:solidFill>
+            <a:srgbClr val="21295C">
+              <a:alpha val="70000"/>
+            </a:srgbClr>
+          </a:solidFill>
+          <a:ln w="12700">
+            <a:solidFill>
+              <a:srgbClr val="21295C">
+                <a:alpha val="0"/>
+              </a:srgbClr>
+            </a:solidFill>
+            <a:prstDash val="solid"/>
+          </a:ln>
+        </p:spPr>
+      </p:sp>
+      <p:sp>
+        <p:nvSpPr>
+          <p:cNvPr id="3" name="Shape 1"/>
           <p:cNvSpPr/>
           <p:nvPr/>
         </p:nvSpPr>
@@ -11250,7 +11318,7 @@
       </p:sp>
       <p:sp>
         <p:nvSpPr>
-          <p:cNvPr id="3" name="Text 1"/>
+          <p:cNvPr id="4" name="Text 2"/>
           <p:cNvSpPr txBox="1"/>
           <p:nvPr/>
         </p:nvSpPr>
@@ -11289,7 +11357,7 @@
       </p:sp>
       <p:sp>
         <p:nvSpPr>
-          <p:cNvPr id="4" name="Text 2"/>
+          <p:cNvPr id="5" name="Text 3"/>
           <p:cNvSpPr txBox="1"/>
           <p:nvPr/>
         </p:nvSpPr>
@@ -11328,7 +11396,7 @@
       </p:sp>
       <p:sp>
         <p:nvSpPr>
-          <p:cNvPr id="5" name="Shape 3"/>
+          <p:cNvPr id="6" name="Shape 4"/>
           <p:cNvSpPr/>
           <p:nvPr/>
         </p:nvSpPr>
@@ -11348,7 +11416,7 @@
       </p:sp>
       <p:sp>
         <p:nvSpPr>
-          <p:cNvPr id="6" name="Text 4"/>
+          <p:cNvPr id="7" name="Text 5"/>
           <p:cNvSpPr txBox="1"/>
           <p:nvPr/>
         </p:nvSpPr>
@@ -11387,7 +11455,7 @@
       </p:sp>
       <p:sp>
         <p:nvSpPr>
-          <p:cNvPr id="7" name="Text 5"/>
+          <p:cNvPr id="8" name="Text 6"/>
           <p:cNvSpPr txBox="1"/>
           <p:nvPr/>
         </p:nvSpPr>
@@ -11415,7 +11483,7 @@
             <a:r>
               <a:rPr lang="en-US" sz="1200" dirty="0">
                 <a:solidFill>
-                  <a:srgbClr val="9FB3D1"/>
+                  <a:srgbClr val="DCE7F5"/>
                 </a:solidFill>
                 <a:latin typeface="Calibri" pitchFamily="34" charset="0"/>
                 <a:ea typeface="Calibri" pitchFamily="34" charset="-122"/>
@@ -11429,7 +11497,7 @@
       </p:sp>
       <p:sp>
         <p:nvSpPr>
-          <p:cNvPr id="8" name="Shape 6"/>
+          <p:cNvPr id="9" name="Shape 7"/>
           <p:cNvSpPr/>
           <p:nvPr/>
         </p:nvSpPr>
@@ -11449,7 +11517,7 @@
       </p:sp>
       <p:sp>
         <p:nvSpPr>
-          <p:cNvPr id="9" name="Text 7"/>
+          <p:cNvPr id="10" name="Text 8"/>
           <p:cNvSpPr txBox="1"/>
           <p:nvPr/>
         </p:nvSpPr>
@@ -11488,7 +11556,7 @@
       </p:sp>
       <p:sp>
         <p:nvSpPr>
-          <p:cNvPr id="10" name="Text 8"/>
+          <p:cNvPr id="11" name="Text 9"/>
           <p:cNvSpPr txBox="1"/>
           <p:nvPr/>
         </p:nvSpPr>
@@ -11516,13 +11584,13 @@
             <a:r>
               <a:rPr lang="en-US" sz="1200" dirty="0">
                 <a:solidFill>
-                  <a:srgbClr val="9FB3D1"/>
+                  <a:srgbClr val="DCE7F5"/>
                 </a:solidFill>
                 <a:latin typeface="Calibri" pitchFamily="34" charset="0"/>
                 <a:ea typeface="Calibri" pitchFamily="34" charset="-122"/>
                 <a:cs typeface="Calibri" pitchFamily="34" charset="-120"/>
               </a:rPr>
-              <a:t>Bathymetry at the heads of Msida and Pietà Creeks, remaining boundary tests, response of the mesh to a broadband impulse.</a:t>
+              <a:t>Bathymetry at the heads of Msida and Pietà Creeks, remaining boundary tests, impulse response of the mesh, first three-dimensional runs.</a:t>
             </a:r>
             <a:endParaRPr lang="en-US" sz="1200" dirty="0"/>
           </a:p>
@@ -11530,7 +11598,7 @@
       </p:sp>
       <p:sp>
         <p:nvSpPr>
-          <p:cNvPr id="11" name="Shape 9"/>
+          <p:cNvPr id="12" name="Shape 10"/>
           <p:cNvSpPr/>
           <p:nvPr/>
         </p:nvSpPr>
@@ -11550,7 +11618,7 @@
       </p:sp>
       <p:sp>
         <p:nvSpPr>
-          <p:cNvPr id="12" name="Text 10"/>
+          <p:cNvPr id="13" name="Text 11"/>
           <p:cNvSpPr txBox="1"/>
           <p:nvPr/>
         </p:nvSpPr>
@@ -11589,7 +11657,7 @@
       </p:sp>
       <p:sp>
         <p:nvSpPr>
-          <p:cNvPr id="13" name="Text 11"/>
+          <p:cNvPr id="14" name="Text 12"/>
           <p:cNvSpPr txBox="1"/>
           <p:nvPr/>
         </p:nvSpPr>
@@ -11617,7 +11685,7 @@
             <a:r>
               <a:rPr lang="en-US" sz="1200" dirty="0">
                 <a:solidFill>
-                  <a:srgbClr val="9FB3D1"/>
+                  <a:srgbClr val="DCE7F5"/>
                 </a:solidFill>
                 <a:latin typeface="Calibri" pitchFamily="34" charset="0"/>
                 <a:ea typeface="Calibri" pitchFamily="34" charset="-122"/>
@@ -11631,7 +11699,7 @@
       </p:sp>
       <p:sp>
         <p:nvSpPr>
-          <p:cNvPr id="14" name="Shape 12"/>
+          <p:cNvPr id="15" name="Shape 13"/>
           <p:cNvSpPr/>
           <p:nvPr/>
         </p:nvSpPr>
@@ -11651,7 +11719,7 @@
       </p:sp>
       <p:sp>
         <p:nvSpPr>
-          <p:cNvPr id="15" name="Text 13"/>
+          <p:cNvPr id="16" name="Text 14"/>
           <p:cNvSpPr txBox="1"/>
           <p:nvPr/>
         </p:nvSpPr>
@@ -11690,7 +11758,7 @@
       </p:sp>
       <p:sp>
         <p:nvSpPr>
-          <p:cNvPr id="16" name="Text 14"/>
+          <p:cNvPr id="17" name="Text 15"/>
           <p:cNvSpPr txBox="1"/>
           <p:nvPr/>
         </p:nvSpPr>
@@ -11718,13 +11786,13 @@
             <a:r>
               <a:rPr lang="en-US" sz="1200" dirty="0">
                 <a:solidFill>
-                  <a:srgbClr val="9FB3D1"/>
+                  <a:srgbClr val="DCE7F5"/>
                 </a:solidFill>
                 <a:latin typeface="Calibri" pitchFamily="34" charset="0"/>
                 <a:ea typeface="Calibri" pitchFamily="34" charset="-122"/>
                 <a:cs typeface="Calibri" pitchFamily="34" charset="-120"/>
               </a:rPr>
-              <a:t>Parametric sweep in two dimensions, first three-dimensional runs.</a:t>
+              <a:t>Sweep of the long wave, barotropic and therefore two-dimensional, and the validation hindcast.</a:t>
             </a:r>
             <a:endParaRPr lang="en-US" sz="1200" dirty="0"/>
           </a:p>
@@ -11732,7 +11800,7 @@
       </p:sp>
       <p:sp>
         <p:nvSpPr>
-          <p:cNvPr id="17" name="Shape 15"/>
+          <p:cNvPr id="18" name="Shape 16"/>
           <p:cNvSpPr/>
           <p:nvPr/>
         </p:nvSpPr>
@@ -11756,7 +11824,7 @@
       </p:sp>
       <p:sp>
         <p:nvSpPr>
-          <p:cNvPr id="18" name="Text 16"/>
+          <p:cNvPr id="19" name="Text 17"/>
           <p:cNvSpPr txBox="1"/>
           <p:nvPr/>
         </p:nvSpPr>
@@ -11795,7 +11863,7 @@
       </p:sp>
       <p:sp>
         <p:nvSpPr>
-          <p:cNvPr id="19" name="Text 17"/>
+          <p:cNvPr id="20" name="Text 18"/>
           <p:cNvSpPr txBox="1"/>
           <p:nvPr/>
         </p:nvSpPr>
@@ -11860,14 +11928,14 @@
       </p:sp>
       <p:sp>
         <p:nvSpPr>
-          <p:cNvPr id="20" name="Text 18"/>
+          <p:cNvPr id="21" name="Text 19"/>
           <p:cNvSpPr txBox="1"/>
           <p:nvPr/>
         </p:nvSpPr>
         <p:spPr>
           <a:xfrm>
             <a:off x="566928" y="6199632"/>
-            <a:ext cx="5852160" cy="274320"/>
+            <a:ext cx="8229600" cy="274320"/>
           </a:xfrm>
           <a:prstGeom prst="rect">
             <a:avLst/>
@@ -11883,17 +11951,35 @@
               <a:buNone/>
             </a:pPr>
             <a:r>
-              <a:rPr lang="en-US" sz="1100" i="1" dirty="0">
+              <a:rPr lang="en-US" sz="1150" i="1" dirty="0">
                 <a:solidFill>
-                  <a:srgbClr val="7F93B3"/>
+                  <a:srgbClr val="CADCFC"/>
                 </a:solidFill>
                 <a:latin typeface="Calibri" pitchFamily="34" charset="0"/>
                 <a:ea typeface="Calibri" pitchFamily="34" charset="-122"/>
                 <a:cs typeface="Calibri" pitchFamily="34" charset="-120"/>
               </a:rPr>
-              <a:t>Documents, figures and the reproducible analysis are in the project repository.</a:t>
+              <a:t>Documents, figures and the reproducible analysis: </a:t>
             </a:r>
-            <a:endParaRPr lang="en-US" sz="1100" dirty="0"/>
+            <a:r>
+              <a:rPr lang="en-US" sz="1150" b="1" u="sng" dirty="0">
+                <a:solidFill>
+                  <a:srgbClr val="FFFFFF"/>
+                </a:solidFill>
+                <a:latin typeface="Calibri" pitchFamily="34" charset="0"/>
+                <a:ea typeface="Calibri" pitchFamily="34" charset="-122"/>
+                <a:cs typeface="Calibri" pitchFamily="34" charset="-120"/>
+                <a:hlinkClick r:id="rId4">
+                  <a:extLst>
+                    <a:ext uri="{A12FA001-AC4F-418D-AE19-62706E023703}">
+                      <ahyp:hlinkClr xmlns:ahyp="http://schemas.microsoft.com/office/drawing/2018/hyperlinkcolor" val="tx"/>
+                    </a:ext>
+                  </a:extLst>
+                </a:hlinkClick>
+              </a:rPr>
+              <a:t>github.com/cicero-martins/MaltaDT</a:t>
+            </a:r>
+            <a:endParaRPr lang="en-US" sz="1150" dirty="0"/>
           </a:p>
         </p:txBody>
       </p:sp>

--- a/docs/valletta_model_concept_2026-10-08_short.pptx
+++ b/docs/valletta_model_concept_2026-10-08_short.pptx
@@ -145,7 +145,7 @@
     </p:spTree>
     <p:extLst>
       <p:ext uri="{BB962C8B-B14F-4D97-AF65-F5344CB8AC3E}">
-        <p14:creationId xmlns:p14="http://schemas.microsoft.com/office/powerpoint/2010/main" val="988184106"/>
+        <p14:creationId xmlns:p14="http://schemas.microsoft.com/office/powerpoint/2010/main" val="2355552709"/>
       </p:ext>
     </p:extLst>
   </p:cSld>
@@ -322,7 +322,7 @@
     </p:spTree>
     <p:extLst>
       <p:ext uri="{BB962C8B-B14F-4D97-AF65-F5344CB8AC3E}">
-        <p14:creationId xmlns:p14="http://schemas.microsoft.com/office/powerpoint/2010/main" val="1419756532"/>
+        <p14:creationId xmlns:p14="http://schemas.microsoft.com/office/powerpoint/2010/main" val="722407455"/>
       </p:ext>
     </p:extLst>
   </p:cSld>
@@ -987,7 +987,7 @@
           <a:p>
             <a:r>
               <a:rPr lang="en-US" dirty="0"/>
-              <a:t>The broadband impulse yields the modal structure of the harbours on the mesh, which bears on the two readings of the 23-minute peak. The remaining boundary tests are the residual current and the non-zero incoming signal from CMEMS.</a:t>
+              <a:t>The broadband impulse yields the modal structure of the harbours on the mesh, which bears on the two readings of the 23-minute peak. The remaining boundary tests are the residual current, the non-zero incoming signal from CMEMS and a pressure disturbance crossing the boundary. The sweep precedes the three-dimensional runs because it needs only the mesh, the boundary and the pressure field, whereas those runs need the full forcing chain. A few scenarios on a larger domain would show whether the extent truncates the Proudman stage. The bathymetry at the heads of Msida and Pietà Creeks is to be completed before the inlets are relied upon.</a:t>
             </a:r>
           </a:p>
         </p:txBody>
@@ -1740,7 +1740,7 @@
     </p:spTree>
     <p:extLst>
       <p:ext uri="{BB962C8B-B14F-4D97-AF65-F5344CB8AC3E}">
-        <p14:creationId xmlns:p14="http://schemas.microsoft.com/office/powerpoint/2010/main" val="4273070046"/>
+        <p14:creationId xmlns:p14="http://schemas.microsoft.com/office/powerpoint/2010/main" val="1679331332"/>
       </p:ext>
     </p:extLst>
   </p:cSld>
@@ -11231,7 +11231,7 @@
           <p:cNvPr id="22" name="Picture 21">
             <a:extLst>
               <a:ext uri="{FF2B5EF4-FFF2-40B4-BE49-F238E27FC236}">
-                <a16:creationId xmlns:a16="http://schemas.microsoft.com/office/drawing/2014/main" id="{5CF043AA-8B3E-0E0E-EE0D-70C3EC073409}"/>
+                <a16:creationId xmlns:a16="http://schemas.microsoft.com/office/drawing/2014/main" id="{FF6310A7-FCDD-B2FC-62E7-C551D608EFE8}"/>
               </a:ext>
             </a:extLst>
           </p:cNvPr>
@@ -11590,7 +11590,7 @@
                 <a:ea typeface="Calibri" pitchFamily="34" charset="-122"/>
                 <a:cs typeface="Calibri" pitchFamily="34" charset="-120"/>
               </a:rPr>
-              <a:t>Bathymetry at the heads of Msida and Pietà Creeks, remaining boundary tests, impulse response of the mesh, first three-dimensional runs.</a:t>
+              <a:t>Boundary tests under pressure forcing, pilot scenario and impulse response, then the sweep of the long wave, barotropic and two-dimensional.</a:t>
             </a:r>
             <a:endParaRPr lang="en-US" sz="1200" dirty="0"/>
           </a:p>
@@ -11792,7 +11792,7 @@
                 <a:ea typeface="Calibri" pitchFamily="34" charset="-122"/>
                 <a:cs typeface="Calibri" pitchFamily="34" charset="-120"/>
               </a:rPr>
-              <a:t>Sweep of the long wave, barotropic and therefore two-dimensional, and the validation hindcast.</a:t>
+              <a:t>Three-dimensional runs of the validation hindcast and of renewal, after a first test run in October.</a:t>
             </a:r>
             <a:endParaRPr lang="en-US" sz="1200" dirty="0"/>
           </a:p>

--- a/docs/valletta_model_concept_2026-10-08_short.pptx
+++ b/docs/valletta_model_concept_2026-10-08_short.pptx
@@ -145,7 +145,7 @@
     </p:spTree>
     <p:extLst>
       <p:ext uri="{BB962C8B-B14F-4D97-AF65-F5344CB8AC3E}">
-        <p14:creationId xmlns:p14="http://schemas.microsoft.com/office/powerpoint/2010/main" val="2355552709"/>
+        <p14:creationId xmlns:p14="http://schemas.microsoft.com/office/powerpoint/2010/main" val="3900080771"/>
       </p:ext>
     </p:extLst>
   </p:cSld>
@@ -322,7 +322,7 @@
     </p:spTree>
     <p:extLst>
       <p:ext uri="{BB962C8B-B14F-4D97-AF65-F5344CB8AC3E}">
-        <p14:creationId xmlns:p14="http://schemas.microsoft.com/office/powerpoint/2010/main" val="722407455"/>
+        <p14:creationId xmlns:p14="http://schemas.microsoft.com/office/powerpoint/2010/main" val="483885198"/>
       </p:ext>
     </p:extLst>
   </p:cSld>
@@ -813,7 +813,7 @@
           <a:p>
             <a:r>
               <a:rPr lang="en-US" dirty="0"/>
-              <a:t>Sources. University of Malta Newspoint for 2018 and 2019, Newsbook for 2022, MaltaToday for 2023 and 2024, the last citing the Oceanography Malta Research Group. The choice of windows rests on monthly coverage and stability of the level and is to be confirmed within the group.</a:t>
+              <a:t>The figure shows the one-minute level after quality control and the daily coverage, with the two admitted windows shaded and the three events reported since installation marked in orange. On 30 June 2022 the record is absent and resumes on 1 July. In July 2023 and June 2024 the level sits some 2 m above its earlier position with coverage near a half, the gauge transmitting by day only. Sources for the events. University of Malta Newspoint for 2018 and 2019, Newsbook for 2022, MaltaToday for 2023 and 2024, the last citing the Oceanography Malta Research Group. Portomaso returns no data from the IOC facility on those dates. The choice of windows rests on monthly coverage and stability of the level and is to be confirmed within the group.</a:t>
             </a:r>
           </a:p>
         </p:txBody>
@@ -1740,7 +1740,7 @@
     </p:spTree>
     <p:extLst>
       <p:ext uri="{BB962C8B-B14F-4D97-AF65-F5344CB8AC3E}">
-        <p14:creationId xmlns:p14="http://schemas.microsoft.com/office/powerpoint/2010/main" val="1679331332"/>
+        <p14:creationId xmlns:p14="http://schemas.microsoft.com/office/powerpoint/2010/main" val="1548432134"/>
       </p:ext>
     </p:extLst>
   </p:cSld>
@@ -8296,6 +8296,30 @@
           </a:p>
         </p:txBody>
       </p:sp>
+      <p:pic>
+        <p:nvPicPr>
+          <p:cNvPr id="5" name="Image 0" descr="C:\Users\Unipa\Documents\MaltaDT\figures\senglea_coverage_events.png"/>
+          <p:cNvPicPr>
+            <a:picLocks noChangeAspect="1"/>
+          </p:cNvPicPr>
+          <p:nvPr/>
+        </p:nvPicPr>
+        <p:blipFill>
+          <a:blip r:embed="rId3"/>
+          <a:stretch>
+            <a:fillRect/>
+          </a:stretch>
+        </p:blipFill>
+        <p:spPr>
+          <a:xfrm>
+            <a:off x="566928" y="2057400"/>
+            <a:ext cx="6858000" cy="2633472"/>
+          </a:xfrm>
+          <a:prstGeom prst="rect">
+            <a:avLst/>
+          </a:prstGeom>
+        </p:spPr>
+      </p:pic>
       <p:graphicFrame>
         <p:nvGraphicFramePr>
           <p:cNvPr id="8" name="Table 0"/>
@@ -8311,44 +8335,37 @@
           </p:nvPr>
         </p:nvGraphicFramePr>
         <p:xfrm>
-          <a:off x="566928" y="2194560"/>
-          <a:ext cx="11055096" cy="914400"/>
+          <a:off x="7589520" y="2057400"/>
+          <a:ext cx="4032504" cy="914400"/>
         </p:xfrm>
         <a:graphic>
           <a:graphicData uri="http://schemas.openxmlformats.org/drawingml/2006/table">
             <a:tbl>
               <a:tblPr/>
               <a:tblGrid>
-                <a:gridCol w="1371600">
+                <a:gridCol w="960120">
                   <a:extLst>
                     <a:ext uri="{9D8B030D-6E8A-4147-A177-3AD203B41FA5}">
                       <a16:colId xmlns:a16="http://schemas.microsoft.com/office/drawing/2014/main" val="20000"/>
                     </a:ext>
                   </a:extLst>
                 </a:gridCol>
-                <a:gridCol w="1645920">
+                <a:gridCol w="1737360">
                   <a:extLst>
                     <a:ext uri="{9D8B030D-6E8A-4147-A177-3AD203B41FA5}">
                       <a16:colId xmlns:a16="http://schemas.microsoft.com/office/drawing/2014/main" val="20001"/>
                     </a:ext>
                   </a:extLst>
                 </a:gridCol>
-                <a:gridCol w="4480560">
+                <a:gridCol w="1335024">
                   <a:extLst>
                     <a:ext uri="{9D8B030D-6E8A-4147-A177-3AD203B41FA5}">
                       <a16:colId xmlns:a16="http://schemas.microsoft.com/office/drawing/2014/main" val="20002"/>
                     </a:ext>
                   </a:extLst>
                 </a:gridCol>
-                <a:gridCol w="3557016">
-                  <a:extLst>
-                    <a:ext uri="{9D8B030D-6E8A-4147-A177-3AD203B41FA5}">
-                      <a16:colId xmlns:a16="http://schemas.microsoft.com/office/drawing/2014/main" val="20003"/>
-                    </a:ext>
-                  </a:extLst>
-                </a:gridCol>
               </a:tblGrid>
-              <a:tr h="347472">
+              <a:tr h="457200">
                 <a:tc>
                   <a:txBody>
                     <a:bodyPr/>
@@ -8358,7 +8375,7 @@
                         <a:buNone/>
                       </a:pPr>
                       <a:r>
-                        <a:rPr lang="en-US" sz="1200" b="1" dirty="0">
+                        <a:rPr lang="en-US" sz="1050" b="1" dirty="0">
                           <a:solidFill>
                             <a:srgbClr val="FFFFFF"/>
                           </a:solidFill>
@@ -8368,7 +8385,7 @@
                         </a:rPr>
                         <a:t>Date</a:t>
                       </a:r>
-                      <a:endParaRPr lang="en-US" sz="1200" dirty="0">
+                      <a:endParaRPr lang="en-US" sz="1050" dirty="0">
                         <a:latin typeface="Calibri" charset="0"/>
                         <a:ea typeface="Calibri" charset="0"/>
                         <a:cs typeface="Calibri" charset="0"/>
@@ -8426,7 +8443,7 @@
                         <a:buNone/>
                       </a:pPr>
                       <a:r>
-                        <a:rPr lang="en-US" sz="1200" b="1" dirty="0">
+                        <a:rPr lang="en-US" sz="1050" b="1" dirty="0">
                           <a:solidFill>
                             <a:srgbClr val="FFFFFF"/>
                           </a:solidFill>
@@ -8434,9 +8451,9 @@
                           <a:ea typeface="Calibri" pitchFamily="34" charset="-122"/>
                           <a:cs typeface="Calibri" pitchFamily="34" charset="-120"/>
                         </a:rPr>
-                        <a:t>Type</a:t>
+                        <a:t>Reported effects</a:t>
                       </a:r>
-                      <a:endParaRPr lang="en-US" sz="1200" dirty="0">
+                      <a:endParaRPr lang="en-US" sz="1050" dirty="0">
                         <a:latin typeface="Calibri" charset="0"/>
                         <a:ea typeface="Calibri" charset="0"/>
                         <a:cs typeface="Calibri" charset="0"/>
@@ -8494,7 +8511,7 @@
                         <a:buNone/>
                       </a:pPr>
                       <a:r>
-                        <a:rPr lang="en-US" sz="1200" b="1" dirty="0">
+                        <a:rPr lang="en-US" sz="1050" b="1" dirty="0">
                           <a:solidFill>
                             <a:srgbClr val="FFFFFF"/>
                           </a:solidFill>
@@ -8502,77 +8519,9 @@
                           <a:ea typeface="Calibri" pitchFamily="34" charset="-122"/>
                           <a:cs typeface="Calibri" pitchFamily="34" charset="-120"/>
                         </a:rPr>
-                        <a:t>Reported effects</a:t>
+                        <a:t>Record</a:t>
                       </a:r>
-                      <a:endParaRPr lang="en-US" sz="1200" dirty="0">
-                        <a:latin typeface="Calibri" charset="0"/>
-                        <a:ea typeface="Calibri" charset="0"/>
-                        <a:cs typeface="Calibri" charset="0"/>
-                      </a:endParaRPr>
-                    </a:p>
-                  </a:txBody>
-                  <a:tcPr anchor="ctr">
-                    <a:lnL w="6350" cap="flat" cmpd="sng" algn="ctr">
-                      <a:solidFill>
-                        <a:srgbClr val="E2E8EC"/>
-                      </a:solidFill>
-                      <a:prstDash val="solid"/>
-                      <a:round/>
-                      <a:headEnd type="none" w="med" len="med"/>
-                      <a:tailEnd type="none" w="med" len="med"/>
-                    </a:lnL>
-                    <a:lnR w="6350" cap="flat" cmpd="sng" algn="ctr">
-                      <a:solidFill>
-                        <a:srgbClr val="E2E8EC"/>
-                      </a:solidFill>
-                      <a:prstDash val="solid"/>
-                      <a:round/>
-                      <a:headEnd type="none" w="med" len="med"/>
-                      <a:tailEnd type="none" w="med" len="med"/>
-                    </a:lnR>
-                    <a:lnT w="6350" cap="flat" cmpd="sng" algn="ctr">
-                      <a:solidFill>
-                        <a:srgbClr val="E2E8EC"/>
-                      </a:solidFill>
-                      <a:prstDash val="solid"/>
-                      <a:round/>
-                      <a:headEnd type="none" w="med" len="med"/>
-                      <a:tailEnd type="none" w="med" len="med"/>
-                    </a:lnT>
-                    <a:lnB w="6350" cap="flat" cmpd="sng" algn="ctr">
-                      <a:solidFill>
-                        <a:srgbClr val="E2E8EC"/>
-                      </a:solidFill>
-                      <a:prstDash val="solid"/>
-                      <a:round/>
-                      <a:headEnd type="none" w="med" len="med"/>
-                      <a:tailEnd type="none" w="med" len="med"/>
-                    </a:lnB>
-                    <a:solidFill>
-                      <a:srgbClr val="065A82"/>
-                    </a:solidFill>
-                  </a:tcPr>
-                </a:tc>
-                <a:tc>
-                  <a:txBody>
-                    <a:bodyPr/>
-                    <a:lstStyle/>
-                    <a:p>
-                      <a:pPr marL="0" indent="0" algn="l">
-                        <a:buNone/>
-                      </a:pPr>
-                      <a:r>
-                        <a:rPr lang="en-US" sz="1200" b="1" dirty="0">
-                          <a:solidFill>
-                            <a:srgbClr val="FFFFFF"/>
-                          </a:solidFill>
-                          <a:latin typeface="Calibri" pitchFamily="34" charset="0"/>
-                          <a:ea typeface="Calibri" pitchFamily="34" charset="-122"/>
-                          <a:cs typeface="Calibri" pitchFamily="34" charset="-120"/>
-                        </a:rPr>
-                        <a:t>Senglea, public copy</a:t>
-                      </a:r>
-                      <a:endParaRPr lang="en-US" sz="1200" dirty="0">
+                      <a:endParaRPr lang="en-US" sz="1050" dirty="0">
                         <a:latin typeface="Calibri" charset="0"/>
                         <a:ea typeface="Calibri" charset="0"/>
                         <a:cs typeface="Calibri" charset="0"/>
@@ -8627,7 +8576,7 @@
                   </a:ext>
                 </a:extLst>
               </a:tr>
-              <a:tr h="347472">
+              <a:tr h="457200">
                 <a:tc>
                   <a:txBody>
                     <a:bodyPr/>
@@ -8637,7 +8586,7 @@
                         <a:buNone/>
                       </a:pPr>
                       <a:r>
-                        <a:rPr lang="en-US" sz="1200" b="1" dirty="0">
+                        <a:rPr lang="en-US" sz="1050" b="1" dirty="0">
                           <a:solidFill>
                             <a:srgbClr val="1A1A1A"/>
                           </a:solidFill>
@@ -8645,9 +8594,9 @@
                           <a:ea typeface="Calibri" pitchFamily="34" charset="-122"/>
                           <a:cs typeface="Calibri" pitchFamily="34" charset="-120"/>
                         </a:rPr>
-                        <a:t>25 Oct 2018</a:t>
+                        <a:t>30 Jun 2022</a:t>
                       </a:r>
-                      <a:endParaRPr lang="en-US" sz="1200" dirty="0">
+                      <a:endParaRPr lang="en-US" sz="1050" dirty="0">
                         <a:latin typeface="Calibri" charset="0"/>
                         <a:ea typeface="Calibri" charset="0"/>
                         <a:cs typeface="Calibri" charset="0"/>
@@ -8705,7 +8654,7 @@
                         <a:buNone/>
                       </a:pPr>
                       <a:r>
-                        <a:rPr lang="en-US" sz="1200" dirty="0">
+                        <a:rPr lang="en-US" sz="1050" dirty="0">
                           <a:solidFill>
                             <a:srgbClr val="1A1A1A"/>
                           </a:solidFill>
@@ -8713,9 +8662,9 @@
                           <a:ea typeface="Calibri" pitchFamily="34" charset="-122"/>
                           <a:cs typeface="Calibri" pitchFamily="34" charset="-120"/>
                         </a:rPr>
-                        <a:t>seismic tsunami</a:t>
+                        <a:t>flooding at Marsaskala, St Julian's and Qawra</a:t>
                       </a:r>
-                      <a:endParaRPr lang="en-US" sz="1200" dirty="0">
+                      <a:endParaRPr lang="en-US" sz="1050" dirty="0">
                         <a:latin typeface="Calibri" charset="0"/>
                         <a:ea typeface="Calibri" charset="0"/>
                         <a:cs typeface="Calibri" charset="0"/>
@@ -8773,7 +8722,7 @@
                         <a:buNone/>
                       </a:pPr>
                       <a:r>
-                        <a:rPr lang="en-US" sz="1200" dirty="0">
+                        <a:rPr lang="en-US" sz="1050" dirty="0">
                           <a:solidFill>
                             <a:srgbClr val="1A1A1A"/>
                           </a:solidFill>
@@ -8781,9 +8730,295 @@
                           <a:ea typeface="Calibri" pitchFamily="34" charset="-122"/>
                           <a:cs typeface="Calibri" pitchFamily="34" charset="-120"/>
                         </a:rPr>
-                        <a:t>excursions of some 25 cm at Portomaso</a:t>
+                        <a:t>no data</a:t>
                       </a:r>
-                      <a:endParaRPr lang="en-US" sz="1200" dirty="0">
+                      <a:endParaRPr lang="en-US" sz="1050" dirty="0">
+                        <a:latin typeface="Calibri" charset="0"/>
+                        <a:ea typeface="Calibri" charset="0"/>
+                        <a:cs typeface="Calibri" charset="0"/>
+                      </a:endParaRPr>
+                    </a:p>
+                  </a:txBody>
+                  <a:tcPr anchor="ctr">
+                    <a:lnL w="6350" cap="flat" cmpd="sng" algn="ctr">
+                      <a:solidFill>
+                        <a:srgbClr val="E2E8EC"/>
+                      </a:solidFill>
+                      <a:prstDash val="solid"/>
+                      <a:round/>
+                      <a:headEnd type="none" w="med" len="med"/>
+                      <a:tailEnd type="none" w="med" len="med"/>
+                    </a:lnL>
+                    <a:lnR w="6350" cap="flat" cmpd="sng" algn="ctr">
+                      <a:solidFill>
+                        <a:srgbClr val="E2E8EC"/>
+                      </a:solidFill>
+                      <a:prstDash val="solid"/>
+                      <a:round/>
+                      <a:headEnd type="none" w="med" len="med"/>
+                      <a:tailEnd type="none" w="med" len="med"/>
+                    </a:lnR>
+                    <a:lnT w="6350" cap="flat" cmpd="sng" algn="ctr">
+                      <a:solidFill>
+                        <a:srgbClr val="E2E8EC"/>
+                      </a:solidFill>
+                      <a:prstDash val="solid"/>
+                      <a:round/>
+                      <a:headEnd type="none" w="med" len="med"/>
+                      <a:tailEnd type="none" w="med" len="med"/>
+                    </a:lnT>
+                    <a:lnB w="6350" cap="flat" cmpd="sng" algn="ctr">
+                      <a:solidFill>
+                        <a:srgbClr val="E2E8EC"/>
+                      </a:solidFill>
+                      <a:prstDash val="solid"/>
+                      <a:round/>
+                      <a:headEnd type="none" w="med" len="med"/>
+                      <a:tailEnd type="none" w="med" len="med"/>
+                    </a:lnB>
+                    <a:solidFill>
+                      <a:srgbClr val="FFFFFF"/>
+                    </a:solidFill>
+                  </a:tcPr>
+                </a:tc>
+                <a:extLst>
+                  <a:ext uri="{0D108BD9-81ED-4DB2-BD59-A6C34878D82A}">
+                    <a16:rowId xmlns:a16="http://schemas.microsoft.com/office/drawing/2014/main" val="10001"/>
+                  </a:ext>
+                </a:extLst>
+              </a:tr>
+              <a:tr h="457200">
+                <a:tc>
+                  <a:txBody>
+                    <a:bodyPr/>
+                    <a:lstStyle/>
+                    <a:p>
+                      <a:pPr marL="0" indent="0" algn="l">
+                        <a:buNone/>
+                      </a:pPr>
+                      <a:r>
+                        <a:rPr lang="en-US" sz="1050" b="1" dirty="0">
+                          <a:solidFill>
+                            <a:srgbClr val="1A1A1A"/>
+                          </a:solidFill>
+                          <a:latin typeface="Calibri" pitchFamily="34" charset="0"/>
+                          <a:ea typeface="Calibri" pitchFamily="34" charset="-122"/>
+                          <a:cs typeface="Calibri" pitchFamily="34" charset="-120"/>
+                        </a:rPr>
+                        <a:t>1 Jul 2023</a:t>
+                      </a:r>
+                      <a:endParaRPr lang="en-US" sz="1050" dirty="0">
+                        <a:latin typeface="Calibri" charset="0"/>
+                        <a:ea typeface="Calibri" charset="0"/>
+                        <a:cs typeface="Calibri" charset="0"/>
+                      </a:endParaRPr>
+                    </a:p>
+                  </a:txBody>
+                  <a:tcPr anchor="ctr">
+                    <a:lnL w="6350" cap="flat" cmpd="sng" algn="ctr">
+                      <a:solidFill>
+                        <a:srgbClr val="E2E8EC"/>
+                      </a:solidFill>
+                      <a:prstDash val="solid"/>
+                      <a:round/>
+                      <a:headEnd type="none" w="med" len="med"/>
+                      <a:tailEnd type="none" w="med" len="med"/>
+                    </a:lnL>
+                    <a:lnR w="6350" cap="flat" cmpd="sng" algn="ctr">
+                      <a:solidFill>
+                        <a:srgbClr val="E2E8EC"/>
+                      </a:solidFill>
+                      <a:prstDash val="solid"/>
+                      <a:round/>
+                      <a:headEnd type="none" w="med" len="med"/>
+                      <a:tailEnd type="none" w="med" len="med"/>
+                    </a:lnR>
+                    <a:lnT w="6350" cap="flat" cmpd="sng" algn="ctr">
+                      <a:solidFill>
+                        <a:srgbClr val="E2E8EC"/>
+                      </a:solidFill>
+                      <a:prstDash val="solid"/>
+                      <a:round/>
+                      <a:headEnd type="none" w="med" len="med"/>
+                      <a:tailEnd type="none" w="med" len="med"/>
+                    </a:lnT>
+                    <a:lnB w="6350" cap="flat" cmpd="sng" algn="ctr">
+                      <a:solidFill>
+                        <a:srgbClr val="E2E8EC"/>
+                      </a:solidFill>
+                      <a:prstDash val="solid"/>
+                      <a:round/>
+                      <a:headEnd type="none" w="med" len="med"/>
+                      <a:tailEnd type="none" w="med" len="med"/>
+                    </a:lnB>
+                    <a:solidFill>
+                      <a:srgbClr val="EEF3F6"/>
+                    </a:solidFill>
+                  </a:tcPr>
+                </a:tc>
+                <a:tc>
+                  <a:txBody>
+                    <a:bodyPr/>
+                    <a:lstStyle/>
+                    <a:p>
+                      <a:pPr marL="0" indent="0" algn="l">
+                        <a:buNone/>
+                      </a:pPr>
+                      <a:r>
+                        <a:rPr lang="en-US" sz="1050" dirty="0">
+                          <a:solidFill>
+                            <a:srgbClr val="1A1A1A"/>
+                          </a:solidFill>
+                          <a:latin typeface="Calibri" pitchFamily="34" charset="0"/>
+                          <a:ea typeface="Calibri" pitchFamily="34" charset="-122"/>
+                          <a:cs typeface="Calibri" pitchFamily="34" charset="-120"/>
+                        </a:rPr>
+                        <a:t>flooding at Marsaskala and Xemxija</a:t>
+                      </a:r>
+                      <a:endParaRPr lang="en-US" sz="1050" dirty="0">
+                        <a:latin typeface="Calibri" charset="0"/>
+                        <a:ea typeface="Calibri" charset="0"/>
+                        <a:cs typeface="Calibri" charset="0"/>
+                      </a:endParaRPr>
+                    </a:p>
+                  </a:txBody>
+                  <a:tcPr anchor="ctr">
+                    <a:lnL w="6350" cap="flat" cmpd="sng" algn="ctr">
+                      <a:solidFill>
+                        <a:srgbClr val="E2E8EC"/>
+                      </a:solidFill>
+                      <a:prstDash val="solid"/>
+                      <a:round/>
+                      <a:headEnd type="none" w="med" len="med"/>
+                      <a:tailEnd type="none" w="med" len="med"/>
+                    </a:lnL>
+                    <a:lnR w="6350" cap="flat" cmpd="sng" algn="ctr">
+                      <a:solidFill>
+                        <a:srgbClr val="E2E8EC"/>
+                      </a:solidFill>
+                      <a:prstDash val="solid"/>
+                      <a:round/>
+                      <a:headEnd type="none" w="med" len="med"/>
+                      <a:tailEnd type="none" w="med" len="med"/>
+                    </a:lnR>
+                    <a:lnT w="6350" cap="flat" cmpd="sng" algn="ctr">
+                      <a:solidFill>
+                        <a:srgbClr val="E2E8EC"/>
+                      </a:solidFill>
+                      <a:prstDash val="solid"/>
+                      <a:round/>
+                      <a:headEnd type="none" w="med" len="med"/>
+                      <a:tailEnd type="none" w="med" len="med"/>
+                    </a:lnT>
+                    <a:lnB w="6350" cap="flat" cmpd="sng" algn="ctr">
+                      <a:solidFill>
+                        <a:srgbClr val="E2E8EC"/>
+                      </a:solidFill>
+                      <a:prstDash val="solid"/>
+                      <a:round/>
+                      <a:headEnd type="none" w="med" len="med"/>
+                      <a:tailEnd type="none" w="med" len="med"/>
+                    </a:lnB>
+                    <a:solidFill>
+                      <a:srgbClr val="EEF3F6"/>
+                    </a:solidFill>
+                  </a:tcPr>
+                </a:tc>
+                <a:tc>
+                  <a:txBody>
+                    <a:bodyPr/>
+                    <a:lstStyle/>
+                    <a:p>
+                      <a:pPr marL="0" indent="0" algn="l">
+                        <a:buNone/>
+                      </a:pPr>
+                      <a:r>
+                        <a:rPr lang="en-US" sz="1050" dirty="0">
+                          <a:solidFill>
+                            <a:srgbClr val="1A1A1A"/>
+                          </a:solidFill>
+                          <a:latin typeface="Calibri" pitchFamily="34" charset="0"/>
+                          <a:ea typeface="Calibri" pitchFamily="34" charset="-122"/>
+                          <a:cs typeface="Calibri" pitchFamily="34" charset="-120"/>
+                        </a:rPr>
+                        <a:t>displaced level, not usable</a:t>
+                      </a:r>
+                      <a:endParaRPr lang="en-US" sz="1050" dirty="0">
+                        <a:latin typeface="Calibri" charset="0"/>
+                        <a:ea typeface="Calibri" charset="0"/>
+                        <a:cs typeface="Calibri" charset="0"/>
+                      </a:endParaRPr>
+                    </a:p>
+                  </a:txBody>
+                  <a:tcPr anchor="ctr">
+                    <a:lnL w="6350" cap="flat" cmpd="sng" algn="ctr">
+                      <a:solidFill>
+                        <a:srgbClr val="E2E8EC"/>
+                      </a:solidFill>
+                      <a:prstDash val="solid"/>
+                      <a:round/>
+                      <a:headEnd type="none" w="med" len="med"/>
+                      <a:tailEnd type="none" w="med" len="med"/>
+                    </a:lnL>
+                    <a:lnR w="6350" cap="flat" cmpd="sng" algn="ctr">
+                      <a:solidFill>
+                        <a:srgbClr val="E2E8EC"/>
+                      </a:solidFill>
+                      <a:prstDash val="solid"/>
+                      <a:round/>
+                      <a:headEnd type="none" w="med" len="med"/>
+                      <a:tailEnd type="none" w="med" len="med"/>
+                    </a:lnR>
+                    <a:lnT w="6350" cap="flat" cmpd="sng" algn="ctr">
+                      <a:solidFill>
+                        <a:srgbClr val="E2E8EC"/>
+                      </a:solidFill>
+                      <a:prstDash val="solid"/>
+                      <a:round/>
+                      <a:headEnd type="none" w="med" len="med"/>
+                      <a:tailEnd type="none" w="med" len="med"/>
+                    </a:lnT>
+                    <a:lnB w="6350" cap="flat" cmpd="sng" algn="ctr">
+                      <a:solidFill>
+                        <a:srgbClr val="E2E8EC"/>
+                      </a:solidFill>
+                      <a:prstDash val="solid"/>
+                      <a:round/>
+                      <a:headEnd type="none" w="med" len="med"/>
+                      <a:tailEnd type="none" w="med" len="med"/>
+                    </a:lnB>
+                    <a:solidFill>
+                      <a:srgbClr val="EEF3F6"/>
+                    </a:solidFill>
+                  </a:tcPr>
+                </a:tc>
+                <a:extLst>
+                  <a:ext uri="{0D108BD9-81ED-4DB2-BD59-A6C34878D82A}">
+                    <a16:rowId xmlns:a16="http://schemas.microsoft.com/office/drawing/2014/main" val="10002"/>
+                  </a:ext>
+                </a:extLst>
+              </a:tr>
+              <a:tr h="457200">
+                <a:tc>
+                  <a:txBody>
+                    <a:bodyPr/>
+                    <a:lstStyle/>
+                    <a:p>
+                      <a:pPr marL="0" indent="0" algn="l">
+                        <a:buNone/>
+                      </a:pPr>
+                      <a:r>
+                        <a:rPr lang="en-US" sz="1050" b="1" dirty="0">
+                          <a:solidFill>
+                            <a:srgbClr val="1A1A1A"/>
+                          </a:solidFill>
+                          <a:latin typeface="Calibri" pitchFamily="34" charset="0"/>
+                          <a:ea typeface="Calibri" pitchFamily="34" charset="-122"/>
+                          <a:cs typeface="Calibri" pitchFamily="34" charset="-120"/>
+                        </a:rPr>
+                        <a:t>13 Jun 2024</a:t>
+                      </a:r>
+                      <a:endParaRPr lang="en-US" sz="1050" dirty="0">
                         <a:latin typeface="Calibri" charset="0"/>
                         <a:ea typeface="Calibri" charset="0"/>
                         <a:cs typeface="Calibri" charset="0"/>
@@ -8841,7 +9076,7 @@
                         <a:buNone/>
                       </a:pPr>
                       <a:r>
-                        <a:rPr lang="en-US" sz="1200" dirty="0">
+                        <a:rPr lang="en-US" sz="1050" dirty="0">
                           <a:solidFill>
                             <a:srgbClr val="1A1A1A"/>
                           </a:solidFill>
@@ -8849,363 +9084,9 @@
                           <a:ea typeface="Calibri" pitchFamily="34" charset="-122"/>
                           <a:cs typeface="Calibri" pitchFamily="34" charset="-120"/>
                         </a:rPr>
-                        <a:t>before installation</a:t>
+                        <a:t>flooding of the main square of Msida</a:t>
                       </a:r>
-                      <a:endParaRPr lang="en-US" sz="1200" dirty="0">
-                        <a:latin typeface="Calibri" charset="0"/>
-                        <a:ea typeface="Calibri" charset="0"/>
-                        <a:cs typeface="Calibri" charset="0"/>
-                      </a:endParaRPr>
-                    </a:p>
-                  </a:txBody>
-                  <a:tcPr anchor="ctr">
-                    <a:lnL w="6350" cap="flat" cmpd="sng" algn="ctr">
-                      <a:solidFill>
-                        <a:srgbClr val="E2E8EC"/>
-                      </a:solidFill>
-                      <a:prstDash val="solid"/>
-                      <a:round/>
-                      <a:headEnd type="none" w="med" len="med"/>
-                      <a:tailEnd type="none" w="med" len="med"/>
-                    </a:lnL>
-                    <a:lnR w="6350" cap="flat" cmpd="sng" algn="ctr">
-                      <a:solidFill>
-                        <a:srgbClr val="E2E8EC"/>
-                      </a:solidFill>
-                      <a:prstDash val="solid"/>
-                      <a:round/>
-                      <a:headEnd type="none" w="med" len="med"/>
-                      <a:tailEnd type="none" w="med" len="med"/>
-                    </a:lnR>
-                    <a:lnT w="6350" cap="flat" cmpd="sng" algn="ctr">
-                      <a:solidFill>
-                        <a:srgbClr val="E2E8EC"/>
-                      </a:solidFill>
-                      <a:prstDash val="solid"/>
-                      <a:round/>
-                      <a:headEnd type="none" w="med" len="med"/>
-                      <a:tailEnd type="none" w="med" len="med"/>
-                    </a:lnT>
-                    <a:lnB w="6350" cap="flat" cmpd="sng" algn="ctr">
-                      <a:solidFill>
-                        <a:srgbClr val="E2E8EC"/>
-                      </a:solidFill>
-                      <a:prstDash val="solid"/>
-                      <a:round/>
-                      <a:headEnd type="none" w="med" len="med"/>
-                      <a:tailEnd type="none" w="med" len="med"/>
-                    </a:lnB>
-                    <a:solidFill>
-                      <a:srgbClr val="FFFFFF"/>
-                    </a:solidFill>
-                  </a:tcPr>
-                </a:tc>
-                <a:extLst>
-                  <a:ext uri="{0D108BD9-81ED-4DB2-BD59-A6C34878D82A}">
-                    <a16:rowId xmlns:a16="http://schemas.microsoft.com/office/drawing/2014/main" val="10001"/>
-                  </a:ext>
-                </a:extLst>
-              </a:tr>
-              <a:tr h="347472">
-                <a:tc>
-                  <a:txBody>
-                    <a:bodyPr/>
-                    <a:lstStyle/>
-                    <a:p>
-                      <a:pPr marL="0" indent="0" algn="l">
-                        <a:buNone/>
-                      </a:pPr>
-                      <a:r>
-                        <a:rPr lang="en-US" sz="1200" b="1" dirty="0">
-                          <a:solidFill>
-                            <a:srgbClr val="1A1A1A"/>
-                          </a:solidFill>
-                          <a:latin typeface="Calibri" pitchFamily="34" charset="0"/>
-                          <a:ea typeface="Calibri" pitchFamily="34" charset="-122"/>
-                          <a:cs typeface="Calibri" pitchFamily="34" charset="-120"/>
-                        </a:rPr>
-                        <a:t>18 Jun 2019</a:t>
-                      </a:r>
-                      <a:endParaRPr lang="en-US" sz="1200" dirty="0">
-                        <a:latin typeface="Calibri" charset="0"/>
-                        <a:ea typeface="Calibri" charset="0"/>
-                        <a:cs typeface="Calibri" charset="0"/>
-                      </a:endParaRPr>
-                    </a:p>
-                  </a:txBody>
-                  <a:tcPr anchor="ctr">
-                    <a:lnL w="6350" cap="flat" cmpd="sng" algn="ctr">
-                      <a:solidFill>
-                        <a:srgbClr val="E2E8EC"/>
-                      </a:solidFill>
-                      <a:prstDash val="solid"/>
-                      <a:round/>
-                      <a:headEnd type="none" w="med" len="med"/>
-                      <a:tailEnd type="none" w="med" len="med"/>
-                    </a:lnL>
-                    <a:lnR w="6350" cap="flat" cmpd="sng" algn="ctr">
-                      <a:solidFill>
-                        <a:srgbClr val="E2E8EC"/>
-                      </a:solidFill>
-                      <a:prstDash val="solid"/>
-                      <a:round/>
-                      <a:headEnd type="none" w="med" len="med"/>
-                      <a:tailEnd type="none" w="med" len="med"/>
-                    </a:lnR>
-                    <a:lnT w="6350" cap="flat" cmpd="sng" algn="ctr">
-                      <a:solidFill>
-                        <a:srgbClr val="E2E8EC"/>
-                      </a:solidFill>
-                      <a:prstDash val="solid"/>
-                      <a:round/>
-                      <a:headEnd type="none" w="med" len="med"/>
-                      <a:tailEnd type="none" w="med" len="med"/>
-                    </a:lnT>
-                    <a:lnB w="6350" cap="flat" cmpd="sng" algn="ctr">
-                      <a:solidFill>
-                        <a:srgbClr val="E2E8EC"/>
-                      </a:solidFill>
-                      <a:prstDash val="solid"/>
-                      <a:round/>
-                      <a:headEnd type="none" w="med" len="med"/>
-                      <a:tailEnd type="none" w="med" len="med"/>
-                    </a:lnB>
-                    <a:solidFill>
-                      <a:srgbClr val="EEF3F6"/>
-                    </a:solidFill>
-                  </a:tcPr>
-                </a:tc>
-                <a:tc>
-                  <a:txBody>
-                    <a:bodyPr/>
-                    <a:lstStyle/>
-                    <a:p>
-                      <a:pPr marL="0" indent="0" algn="l">
-                        <a:buNone/>
-                      </a:pPr>
-                      <a:r>
-                        <a:rPr lang="en-US" sz="1200" dirty="0">
-                          <a:solidFill>
-                            <a:srgbClr val="1A1A1A"/>
-                          </a:solidFill>
-                          <a:latin typeface="Calibri" pitchFamily="34" charset="0"/>
-                          <a:ea typeface="Calibri" pitchFamily="34" charset="-122"/>
-                          <a:cs typeface="Calibri" pitchFamily="34" charset="-120"/>
-                        </a:rPr>
-                        <a:t>milgħuba</a:t>
-                      </a:r>
-                      <a:endParaRPr lang="en-US" sz="1200" dirty="0">
-                        <a:latin typeface="Calibri" charset="0"/>
-                        <a:ea typeface="Calibri" charset="0"/>
-                        <a:cs typeface="Calibri" charset="0"/>
-                      </a:endParaRPr>
-                    </a:p>
-                  </a:txBody>
-                  <a:tcPr anchor="ctr">
-                    <a:lnL w="6350" cap="flat" cmpd="sng" algn="ctr">
-                      <a:solidFill>
-                        <a:srgbClr val="E2E8EC"/>
-                      </a:solidFill>
-                      <a:prstDash val="solid"/>
-                      <a:round/>
-                      <a:headEnd type="none" w="med" len="med"/>
-                      <a:tailEnd type="none" w="med" len="med"/>
-                    </a:lnL>
-                    <a:lnR w="6350" cap="flat" cmpd="sng" algn="ctr">
-                      <a:solidFill>
-                        <a:srgbClr val="E2E8EC"/>
-                      </a:solidFill>
-                      <a:prstDash val="solid"/>
-                      <a:round/>
-                      <a:headEnd type="none" w="med" len="med"/>
-                      <a:tailEnd type="none" w="med" len="med"/>
-                    </a:lnR>
-                    <a:lnT w="6350" cap="flat" cmpd="sng" algn="ctr">
-                      <a:solidFill>
-                        <a:srgbClr val="E2E8EC"/>
-                      </a:solidFill>
-                      <a:prstDash val="solid"/>
-                      <a:round/>
-                      <a:headEnd type="none" w="med" len="med"/>
-                      <a:tailEnd type="none" w="med" len="med"/>
-                    </a:lnT>
-                    <a:lnB w="6350" cap="flat" cmpd="sng" algn="ctr">
-                      <a:solidFill>
-                        <a:srgbClr val="E2E8EC"/>
-                      </a:solidFill>
-                      <a:prstDash val="solid"/>
-                      <a:round/>
-                      <a:headEnd type="none" w="med" len="med"/>
-                      <a:tailEnd type="none" w="med" len="med"/>
-                    </a:lnB>
-                    <a:solidFill>
-                      <a:srgbClr val="EEF3F6"/>
-                    </a:solidFill>
-                  </a:tcPr>
-                </a:tc>
-                <a:tc>
-                  <a:txBody>
-                    <a:bodyPr/>
-                    <a:lstStyle/>
-                    <a:p>
-                      <a:pPr marL="0" indent="0" algn="l">
-                        <a:buNone/>
-                      </a:pPr>
-                      <a:r>
-                        <a:rPr lang="en-US" sz="1200" dirty="0">
-                          <a:solidFill>
-                            <a:srgbClr val="1A1A1A"/>
-                          </a:solidFill>
-                          <a:latin typeface="Calibri" pitchFamily="34" charset="0"/>
-                          <a:ea typeface="Calibri" pitchFamily="34" charset="-122"/>
-                          <a:cs typeface="Calibri" pitchFamily="34" charset="-120"/>
-                        </a:rPr>
-                        <a:t>sea bed exposed and quay overtopped in St Paul's Bay</a:t>
-                      </a:r>
-                      <a:endParaRPr lang="en-US" sz="1200" dirty="0">
-                        <a:latin typeface="Calibri" charset="0"/>
-                        <a:ea typeface="Calibri" charset="0"/>
-                        <a:cs typeface="Calibri" charset="0"/>
-                      </a:endParaRPr>
-                    </a:p>
-                  </a:txBody>
-                  <a:tcPr anchor="ctr">
-                    <a:lnL w="6350" cap="flat" cmpd="sng" algn="ctr">
-                      <a:solidFill>
-                        <a:srgbClr val="E2E8EC"/>
-                      </a:solidFill>
-                      <a:prstDash val="solid"/>
-                      <a:round/>
-                      <a:headEnd type="none" w="med" len="med"/>
-                      <a:tailEnd type="none" w="med" len="med"/>
-                    </a:lnL>
-                    <a:lnR w="6350" cap="flat" cmpd="sng" algn="ctr">
-                      <a:solidFill>
-                        <a:srgbClr val="E2E8EC"/>
-                      </a:solidFill>
-                      <a:prstDash val="solid"/>
-                      <a:round/>
-                      <a:headEnd type="none" w="med" len="med"/>
-                      <a:tailEnd type="none" w="med" len="med"/>
-                    </a:lnR>
-                    <a:lnT w="6350" cap="flat" cmpd="sng" algn="ctr">
-                      <a:solidFill>
-                        <a:srgbClr val="E2E8EC"/>
-                      </a:solidFill>
-                      <a:prstDash val="solid"/>
-                      <a:round/>
-                      <a:headEnd type="none" w="med" len="med"/>
-                      <a:tailEnd type="none" w="med" len="med"/>
-                    </a:lnT>
-                    <a:lnB w="6350" cap="flat" cmpd="sng" algn="ctr">
-                      <a:solidFill>
-                        <a:srgbClr val="E2E8EC"/>
-                      </a:solidFill>
-                      <a:prstDash val="solid"/>
-                      <a:round/>
-                      <a:headEnd type="none" w="med" len="med"/>
-                      <a:tailEnd type="none" w="med" len="med"/>
-                    </a:lnB>
-                    <a:solidFill>
-                      <a:srgbClr val="EEF3F6"/>
-                    </a:solidFill>
-                  </a:tcPr>
-                </a:tc>
-                <a:tc>
-                  <a:txBody>
-                    <a:bodyPr/>
-                    <a:lstStyle/>
-                    <a:p>
-                      <a:pPr marL="0" indent="0" algn="l">
-                        <a:buNone/>
-                      </a:pPr>
-                      <a:r>
-                        <a:rPr lang="en-US" sz="1200" dirty="0">
-                          <a:solidFill>
-                            <a:srgbClr val="1A1A1A"/>
-                          </a:solidFill>
-                          <a:latin typeface="Calibri" pitchFamily="34" charset="0"/>
-                          <a:ea typeface="Calibri" pitchFamily="34" charset="-122"/>
-                          <a:cs typeface="Calibri" pitchFamily="34" charset="-120"/>
-                        </a:rPr>
-                        <a:t>before installation</a:t>
-                      </a:r>
-                      <a:endParaRPr lang="en-US" sz="1200" dirty="0">
-                        <a:latin typeface="Calibri" charset="0"/>
-                        <a:ea typeface="Calibri" charset="0"/>
-                        <a:cs typeface="Calibri" charset="0"/>
-                      </a:endParaRPr>
-                    </a:p>
-                  </a:txBody>
-                  <a:tcPr anchor="ctr">
-                    <a:lnL w="6350" cap="flat" cmpd="sng" algn="ctr">
-                      <a:solidFill>
-                        <a:srgbClr val="E2E8EC"/>
-                      </a:solidFill>
-                      <a:prstDash val="solid"/>
-                      <a:round/>
-                      <a:headEnd type="none" w="med" len="med"/>
-                      <a:tailEnd type="none" w="med" len="med"/>
-                    </a:lnL>
-                    <a:lnR w="6350" cap="flat" cmpd="sng" algn="ctr">
-                      <a:solidFill>
-                        <a:srgbClr val="E2E8EC"/>
-                      </a:solidFill>
-                      <a:prstDash val="solid"/>
-                      <a:round/>
-                      <a:headEnd type="none" w="med" len="med"/>
-                      <a:tailEnd type="none" w="med" len="med"/>
-                    </a:lnR>
-                    <a:lnT w="6350" cap="flat" cmpd="sng" algn="ctr">
-                      <a:solidFill>
-                        <a:srgbClr val="E2E8EC"/>
-                      </a:solidFill>
-                      <a:prstDash val="solid"/>
-                      <a:round/>
-                      <a:headEnd type="none" w="med" len="med"/>
-                      <a:tailEnd type="none" w="med" len="med"/>
-                    </a:lnT>
-                    <a:lnB w="6350" cap="flat" cmpd="sng" algn="ctr">
-                      <a:solidFill>
-                        <a:srgbClr val="E2E8EC"/>
-                      </a:solidFill>
-                      <a:prstDash val="solid"/>
-                      <a:round/>
-                      <a:headEnd type="none" w="med" len="med"/>
-                      <a:tailEnd type="none" w="med" len="med"/>
-                    </a:lnB>
-                    <a:solidFill>
-                      <a:srgbClr val="EEF3F6"/>
-                    </a:solidFill>
-                  </a:tcPr>
-                </a:tc>
-                <a:extLst>
-                  <a:ext uri="{0D108BD9-81ED-4DB2-BD59-A6C34878D82A}">
-                    <a16:rowId xmlns:a16="http://schemas.microsoft.com/office/drawing/2014/main" val="10002"/>
-                  </a:ext>
-                </a:extLst>
-              </a:tr>
-              <a:tr h="347472">
-                <a:tc>
-                  <a:txBody>
-                    <a:bodyPr/>
-                    <a:lstStyle/>
-                    <a:p>
-                      <a:pPr marL="0" indent="0" algn="l">
-                        <a:buNone/>
-                      </a:pPr>
-                      <a:r>
-                        <a:rPr lang="en-US" sz="1200" b="1" dirty="0">
-                          <a:solidFill>
-                            <a:srgbClr val="1A1A1A"/>
-                          </a:solidFill>
-                          <a:latin typeface="Calibri" pitchFamily="34" charset="0"/>
-                          <a:ea typeface="Calibri" pitchFamily="34" charset="-122"/>
-                          <a:cs typeface="Calibri" pitchFamily="34" charset="-120"/>
-                        </a:rPr>
-                        <a:t>30 Jun 2022</a:t>
-                      </a:r>
-                      <a:endParaRPr lang="en-US" sz="1200" dirty="0">
+                      <a:endParaRPr lang="en-US" sz="1050" dirty="0">
                         <a:latin typeface="Calibri" charset="0"/>
                         <a:ea typeface="Calibri" charset="0"/>
                         <a:cs typeface="Calibri" charset="0"/>
@@ -9263,7 +9144,7 @@
                         <a:buNone/>
                       </a:pPr>
                       <a:r>
-                        <a:rPr lang="en-US" sz="1200" dirty="0">
+                        <a:rPr lang="en-US" sz="1050" dirty="0">
                           <a:solidFill>
                             <a:srgbClr val="1A1A1A"/>
                           </a:solidFill>
@@ -9271,145 +9152,9 @@
                           <a:ea typeface="Calibri" pitchFamily="34" charset="-122"/>
                           <a:cs typeface="Calibri" pitchFamily="34" charset="-120"/>
                         </a:rPr>
-                        <a:t>milgħuba</a:t>
+                        <a:t>displaced level, not usable</a:t>
                       </a:r>
-                      <a:endParaRPr lang="en-US" sz="1200" dirty="0">
-                        <a:latin typeface="Calibri" charset="0"/>
-                        <a:ea typeface="Calibri" charset="0"/>
-                        <a:cs typeface="Calibri" charset="0"/>
-                      </a:endParaRPr>
-                    </a:p>
-                  </a:txBody>
-                  <a:tcPr anchor="ctr">
-                    <a:lnL w="6350" cap="flat" cmpd="sng" algn="ctr">
-                      <a:solidFill>
-                        <a:srgbClr val="E2E8EC"/>
-                      </a:solidFill>
-                      <a:prstDash val="solid"/>
-                      <a:round/>
-                      <a:headEnd type="none" w="med" len="med"/>
-                      <a:tailEnd type="none" w="med" len="med"/>
-                    </a:lnL>
-                    <a:lnR w="6350" cap="flat" cmpd="sng" algn="ctr">
-                      <a:solidFill>
-                        <a:srgbClr val="E2E8EC"/>
-                      </a:solidFill>
-                      <a:prstDash val="solid"/>
-                      <a:round/>
-                      <a:headEnd type="none" w="med" len="med"/>
-                      <a:tailEnd type="none" w="med" len="med"/>
-                    </a:lnR>
-                    <a:lnT w="6350" cap="flat" cmpd="sng" algn="ctr">
-                      <a:solidFill>
-                        <a:srgbClr val="E2E8EC"/>
-                      </a:solidFill>
-                      <a:prstDash val="solid"/>
-                      <a:round/>
-                      <a:headEnd type="none" w="med" len="med"/>
-                      <a:tailEnd type="none" w="med" len="med"/>
-                    </a:lnT>
-                    <a:lnB w="6350" cap="flat" cmpd="sng" algn="ctr">
-                      <a:solidFill>
-                        <a:srgbClr val="E2E8EC"/>
-                      </a:solidFill>
-                      <a:prstDash val="solid"/>
-                      <a:round/>
-                      <a:headEnd type="none" w="med" len="med"/>
-                      <a:tailEnd type="none" w="med" len="med"/>
-                    </a:lnB>
-                    <a:solidFill>
-                      <a:srgbClr val="FFFFFF"/>
-                    </a:solidFill>
-                  </a:tcPr>
-                </a:tc>
-                <a:tc>
-                  <a:txBody>
-                    <a:bodyPr/>
-                    <a:lstStyle/>
-                    <a:p>
-                      <a:pPr marL="0" indent="0" algn="l">
-                        <a:buNone/>
-                      </a:pPr>
-                      <a:r>
-                        <a:rPr lang="en-US" sz="1200" dirty="0">
-                          <a:solidFill>
-                            <a:srgbClr val="1A1A1A"/>
-                          </a:solidFill>
-                          <a:latin typeface="Calibri" pitchFamily="34" charset="0"/>
-                          <a:ea typeface="Calibri" pitchFamily="34" charset="-122"/>
-                          <a:cs typeface="Calibri" pitchFamily="34" charset="-120"/>
-                        </a:rPr>
-                        <a:t>flooding at Marsaskala, St Julian's and Qawra</a:t>
-                      </a:r>
-                      <a:endParaRPr lang="en-US" sz="1200" dirty="0">
-                        <a:latin typeface="Calibri" charset="0"/>
-                        <a:ea typeface="Calibri" charset="0"/>
-                        <a:cs typeface="Calibri" charset="0"/>
-                      </a:endParaRPr>
-                    </a:p>
-                  </a:txBody>
-                  <a:tcPr anchor="ctr">
-                    <a:lnL w="6350" cap="flat" cmpd="sng" algn="ctr">
-                      <a:solidFill>
-                        <a:srgbClr val="E2E8EC"/>
-                      </a:solidFill>
-                      <a:prstDash val="solid"/>
-                      <a:round/>
-                      <a:headEnd type="none" w="med" len="med"/>
-                      <a:tailEnd type="none" w="med" len="med"/>
-                    </a:lnL>
-                    <a:lnR w="6350" cap="flat" cmpd="sng" algn="ctr">
-                      <a:solidFill>
-                        <a:srgbClr val="E2E8EC"/>
-                      </a:solidFill>
-                      <a:prstDash val="solid"/>
-                      <a:round/>
-                      <a:headEnd type="none" w="med" len="med"/>
-                      <a:tailEnd type="none" w="med" len="med"/>
-                    </a:lnR>
-                    <a:lnT w="6350" cap="flat" cmpd="sng" algn="ctr">
-                      <a:solidFill>
-                        <a:srgbClr val="E2E8EC"/>
-                      </a:solidFill>
-                      <a:prstDash val="solid"/>
-                      <a:round/>
-                      <a:headEnd type="none" w="med" len="med"/>
-                      <a:tailEnd type="none" w="med" len="med"/>
-                    </a:lnT>
-                    <a:lnB w="6350" cap="flat" cmpd="sng" algn="ctr">
-                      <a:solidFill>
-                        <a:srgbClr val="E2E8EC"/>
-                      </a:solidFill>
-                      <a:prstDash val="solid"/>
-                      <a:round/>
-                      <a:headEnd type="none" w="med" len="med"/>
-                      <a:tailEnd type="none" w="med" len="med"/>
-                    </a:lnB>
-                    <a:solidFill>
-                      <a:srgbClr val="FFFFFF"/>
-                    </a:solidFill>
-                  </a:tcPr>
-                </a:tc>
-                <a:tc>
-                  <a:txBody>
-                    <a:bodyPr/>
-                    <a:lstStyle/>
-                    <a:p>
-                      <a:pPr marL="0" indent="0" algn="l">
-                        <a:buNone/>
-                      </a:pPr>
-                      <a:r>
-                        <a:rPr lang="en-US" sz="1200" dirty="0">
-                          <a:solidFill>
-                            <a:srgbClr val="1A1A1A"/>
-                          </a:solidFill>
-                          <a:latin typeface="Calibri" pitchFamily="34" charset="0"/>
-                          <a:ea typeface="Calibri" pitchFamily="34" charset="-122"/>
-                          <a:cs typeface="Calibri" pitchFamily="34" charset="-120"/>
-                        </a:rPr>
-                        <a:t>no data, record resumes on 1 July</a:t>
-                      </a:r>
-                      <a:endParaRPr lang="en-US" sz="1200" dirty="0">
+                      <a:endParaRPr lang="en-US" sz="1050" dirty="0">
                         <a:latin typeface="Calibri" charset="0"/>
                         <a:ea typeface="Calibri" charset="0"/>
                         <a:cs typeface="Calibri" charset="0"/>
@@ -9464,582 +9209,66 @@
                   </a:ext>
                 </a:extLst>
               </a:tr>
-              <a:tr h="347472">
-                <a:tc>
-                  <a:txBody>
-                    <a:bodyPr/>
-                    <a:lstStyle/>
-                    <a:p>
-                      <a:pPr marL="0" indent="0" algn="l">
-                        <a:buNone/>
-                      </a:pPr>
-                      <a:r>
-                        <a:rPr lang="en-US" sz="1200" b="1" dirty="0">
-                          <a:solidFill>
-                            <a:srgbClr val="1A1A1A"/>
-                          </a:solidFill>
-                          <a:latin typeface="Calibri" pitchFamily="34" charset="0"/>
-                          <a:ea typeface="Calibri" pitchFamily="34" charset="-122"/>
-                          <a:cs typeface="Calibri" pitchFamily="34" charset="-120"/>
-                        </a:rPr>
-                        <a:t>1 Jul 2023</a:t>
-                      </a:r>
-                      <a:endParaRPr lang="en-US" sz="1200" dirty="0">
-                        <a:latin typeface="Calibri" charset="0"/>
-                        <a:ea typeface="Calibri" charset="0"/>
-                        <a:cs typeface="Calibri" charset="0"/>
-                      </a:endParaRPr>
-                    </a:p>
-                  </a:txBody>
-                  <a:tcPr anchor="ctr">
-                    <a:lnL w="6350" cap="flat" cmpd="sng" algn="ctr">
-                      <a:solidFill>
-                        <a:srgbClr val="E2E8EC"/>
-                      </a:solidFill>
-                      <a:prstDash val="solid"/>
-                      <a:round/>
-                      <a:headEnd type="none" w="med" len="med"/>
-                      <a:tailEnd type="none" w="med" len="med"/>
-                    </a:lnL>
-                    <a:lnR w="6350" cap="flat" cmpd="sng" algn="ctr">
-                      <a:solidFill>
-                        <a:srgbClr val="E2E8EC"/>
-                      </a:solidFill>
-                      <a:prstDash val="solid"/>
-                      <a:round/>
-                      <a:headEnd type="none" w="med" len="med"/>
-                      <a:tailEnd type="none" w="med" len="med"/>
-                    </a:lnR>
-                    <a:lnT w="6350" cap="flat" cmpd="sng" algn="ctr">
-                      <a:solidFill>
-                        <a:srgbClr val="E2E8EC"/>
-                      </a:solidFill>
-                      <a:prstDash val="solid"/>
-                      <a:round/>
-                      <a:headEnd type="none" w="med" len="med"/>
-                      <a:tailEnd type="none" w="med" len="med"/>
-                    </a:lnT>
-                    <a:lnB w="6350" cap="flat" cmpd="sng" algn="ctr">
-                      <a:solidFill>
-                        <a:srgbClr val="E2E8EC"/>
-                      </a:solidFill>
-                      <a:prstDash val="solid"/>
-                      <a:round/>
-                      <a:headEnd type="none" w="med" len="med"/>
-                      <a:tailEnd type="none" w="med" len="med"/>
-                    </a:lnB>
-                    <a:solidFill>
-                      <a:srgbClr val="EEF3F6"/>
-                    </a:solidFill>
-                  </a:tcPr>
-                </a:tc>
-                <a:tc>
-                  <a:txBody>
-                    <a:bodyPr/>
-                    <a:lstStyle/>
-                    <a:p>
-                      <a:pPr marL="0" indent="0" algn="l">
-                        <a:buNone/>
-                      </a:pPr>
-                      <a:r>
-                        <a:rPr lang="en-US" sz="1200" dirty="0">
-                          <a:solidFill>
-                            <a:srgbClr val="1A1A1A"/>
-                          </a:solidFill>
-                          <a:latin typeface="Calibri" pitchFamily="34" charset="0"/>
-                          <a:ea typeface="Calibri" pitchFamily="34" charset="-122"/>
-                          <a:cs typeface="Calibri" pitchFamily="34" charset="-120"/>
-                        </a:rPr>
-                        <a:t>milgħuba</a:t>
-                      </a:r>
-                      <a:endParaRPr lang="en-US" sz="1200" dirty="0">
-                        <a:latin typeface="Calibri" charset="0"/>
-                        <a:ea typeface="Calibri" charset="0"/>
-                        <a:cs typeface="Calibri" charset="0"/>
-                      </a:endParaRPr>
-                    </a:p>
-                  </a:txBody>
-                  <a:tcPr anchor="ctr">
-                    <a:lnL w="6350" cap="flat" cmpd="sng" algn="ctr">
-                      <a:solidFill>
-                        <a:srgbClr val="E2E8EC"/>
-                      </a:solidFill>
-                      <a:prstDash val="solid"/>
-                      <a:round/>
-                      <a:headEnd type="none" w="med" len="med"/>
-                      <a:tailEnd type="none" w="med" len="med"/>
-                    </a:lnL>
-                    <a:lnR w="6350" cap="flat" cmpd="sng" algn="ctr">
-                      <a:solidFill>
-                        <a:srgbClr val="E2E8EC"/>
-                      </a:solidFill>
-                      <a:prstDash val="solid"/>
-                      <a:round/>
-                      <a:headEnd type="none" w="med" len="med"/>
-                      <a:tailEnd type="none" w="med" len="med"/>
-                    </a:lnR>
-                    <a:lnT w="6350" cap="flat" cmpd="sng" algn="ctr">
-                      <a:solidFill>
-                        <a:srgbClr val="E2E8EC"/>
-                      </a:solidFill>
-                      <a:prstDash val="solid"/>
-                      <a:round/>
-                      <a:headEnd type="none" w="med" len="med"/>
-                      <a:tailEnd type="none" w="med" len="med"/>
-                    </a:lnT>
-                    <a:lnB w="6350" cap="flat" cmpd="sng" algn="ctr">
-                      <a:solidFill>
-                        <a:srgbClr val="E2E8EC"/>
-                      </a:solidFill>
-                      <a:prstDash val="solid"/>
-                      <a:round/>
-                      <a:headEnd type="none" w="med" len="med"/>
-                      <a:tailEnd type="none" w="med" len="med"/>
-                    </a:lnB>
-                    <a:solidFill>
-                      <a:srgbClr val="EEF3F6"/>
-                    </a:solidFill>
-                  </a:tcPr>
-                </a:tc>
-                <a:tc>
-                  <a:txBody>
-                    <a:bodyPr/>
-                    <a:lstStyle/>
-                    <a:p>
-                      <a:pPr marL="0" indent="0" algn="l">
-                        <a:buNone/>
-                      </a:pPr>
-                      <a:r>
-                        <a:rPr lang="en-US" sz="1200" dirty="0">
-                          <a:solidFill>
-                            <a:srgbClr val="1A1A1A"/>
-                          </a:solidFill>
-                          <a:latin typeface="Calibri" pitchFamily="34" charset="0"/>
-                          <a:ea typeface="Calibri" pitchFamily="34" charset="-122"/>
-                          <a:cs typeface="Calibri" pitchFamily="34" charset="-120"/>
-                        </a:rPr>
-                        <a:t>flooding at Marsaskala and Xemxija</a:t>
-                      </a:r>
-                      <a:endParaRPr lang="en-US" sz="1200" dirty="0">
-                        <a:latin typeface="Calibri" charset="0"/>
-                        <a:ea typeface="Calibri" charset="0"/>
-                        <a:cs typeface="Calibri" charset="0"/>
-                      </a:endParaRPr>
-                    </a:p>
-                  </a:txBody>
-                  <a:tcPr anchor="ctr">
-                    <a:lnL w="6350" cap="flat" cmpd="sng" algn="ctr">
-                      <a:solidFill>
-                        <a:srgbClr val="E2E8EC"/>
-                      </a:solidFill>
-                      <a:prstDash val="solid"/>
-                      <a:round/>
-                      <a:headEnd type="none" w="med" len="med"/>
-                      <a:tailEnd type="none" w="med" len="med"/>
-                    </a:lnL>
-                    <a:lnR w="6350" cap="flat" cmpd="sng" algn="ctr">
-                      <a:solidFill>
-                        <a:srgbClr val="E2E8EC"/>
-                      </a:solidFill>
-                      <a:prstDash val="solid"/>
-                      <a:round/>
-                      <a:headEnd type="none" w="med" len="med"/>
-                      <a:tailEnd type="none" w="med" len="med"/>
-                    </a:lnR>
-                    <a:lnT w="6350" cap="flat" cmpd="sng" algn="ctr">
-                      <a:solidFill>
-                        <a:srgbClr val="E2E8EC"/>
-                      </a:solidFill>
-                      <a:prstDash val="solid"/>
-                      <a:round/>
-                      <a:headEnd type="none" w="med" len="med"/>
-                      <a:tailEnd type="none" w="med" len="med"/>
-                    </a:lnT>
-                    <a:lnB w="6350" cap="flat" cmpd="sng" algn="ctr">
-                      <a:solidFill>
-                        <a:srgbClr val="E2E8EC"/>
-                      </a:solidFill>
-                      <a:prstDash val="solid"/>
-                      <a:round/>
-                      <a:headEnd type="none" w="med" len="med"/>
-                      <a:tailEnd type="none" w="med" len="med"/>
-                    </a:lnB>
-                    <a:solidFill>
-                      <a:srgbClr val="EEF3F6"/>
-                    </a:solidFill>
-                  </a:tcPr>
-                </a:tc>
-                <a:tc>
-                  <a:txBody>
-                    <a:bodyPr/>
-                    <a:lstStyle/>
-                    <a:p>
-                      <a:pPr marL="0" indent="0" algn="l">
-                        <a:buNone/>
-                      </a:pPr>
-                      <a:r>
-                        <a:rPr lang="en-US" sz="1200" dirty="0">
-                          <a:solidFill>
-                            <a:srgbClr val="1A1A1A"/>
-                          </a:solidFill>
-                          <a:latin typeface="Calibri" pitchFamily="34" charset="0"/>
-                          <a:ea typeface="Calibri" pitchFamily="34" charset="-122"/>
-                          <a:cs typeface="Calibri" pitchFamily="34" charset="-120"/>
-                        </a:rPr>
-                        <a:t>displaced level, not usable</a:t>
-                      </a:r>
-                      <a:endParaRPr lang="en-US" sz="1200" dirty="0">
-                        <a:latin typeface="Calibri" charset="0"/>
-                        <a:ea typeface="Calibri" charset="0"/>
-                        <a:cs typeface="Calibri" charset="0"/>
-                      </a:endParaRPr>
-                    </a:p>
-                  </a:txBody>
-                  <a:tcPr anchor="ctr">
-                    <a:lnL w="6350" cap="flat" cmpd="sng" algn="ctr">
-                      <a:solidFill>
-                        <a:srgbClr val="E2E8EC"/>
-                      </a:solidFill>
-                      <a:prstDash val="solid"/>
-                      <a:round/>
-                      <a:headEnd type="none" w="med" len="med"/>
-                      <a:tailEnd type="none" w="med" len="med"/>
-                    </a:lnL>
-                    <a:lnR w="6350" cap="flat" cmpd="sng" algn="ctr">
-                      <a:solidFill>
-                        <a:srgbClr val="E2E8EC"/>
-                      </a:solidFill>
-                      <a:prstDash val="solid"/>
-                      <a:round/>
-                      <a:headEnd type="none" w="med" len="med"/>
-                      <a:tailEnd type="none" w="med" len="med"/>
-                    </a:lnR>
-                    <a:lnT w="6350" cap="flat" cmpd="sng" algn="ctr">
-                      <a:solidFill>
-                        <a:srgbClr val="E2E8EC"/>
-                      </a:solidFill>
-                      <a:prstDash val="solid"/>
-                      <a:round/>
-                      <a:headEnd type="none" w="med" len="med"/>
-                      <a:tailEnd type="none" w="med" len="med"/>
-                    </a:lnT>
-                    <a:lnB w="6350" cap="flat" cmpd="sng" algn="ctr">
-                      <a:solidFill>
-                        <a:srgbClr val="E2E8EC"/>
-                      </a:solidFill>
-                      <a:prstDash val="solid"/>
-                      <a:round/>
-                      <a:headEnd type="none" w="med" len="med"/>
-                      <a:tailEnd type="none" w="med" len="med"/>
-                    </a:lnB>
-                    <a:solidFill>
-                      <a:srgbClr val="EEF3F6"/>
-                    </a:solidFill>
-                  </a:tcPr>
-                </a:tc>
-                <a:extLst>
-                  <a:ext uri="{0D108BD9-81ED-4DB2-BD59-A6C34878D82A}">
-                    <a16:rowId xmlns:a16="http://schemas.microsoft.com/office/drawing/2014/main" val="10004"/>
-                  </a:ext>
-                </a:extLst>
-              </a:tr>
-              <a:tr h="347472">
-                <a:tc>
-                  <a:txBody>
-                    <a:bodyPr/>
-                    <a:lstStyle/>
-                    <a:p>
-                      <a:pPr marL="0" indent="0" algn="l">
-                        <a:buNone/>
-                      </a:pPr>
-                      <a:r>
-                        <a:rPr lang="en-US" sz="1200" b="1" dirty="0">
-                          <a:solidFill>
-                            <a:srgbClr val="1A1A1A"/>
-                          </a:solidFill>
-                          <a:latin typeface="Calibri" pitchFamily="34" charset="0"/>
-                          <a:ea typeface="Calibri" pitchFamily="34" charset="-122"/>
-                          <a:cs typeface="Calibri" pitchFamily="34" charset="-120"/>
-                        </a:rPr>
-                        <a:t>13 Jun 2024</a:t>
-                      </a:r>
-                      <a:endParaRPr lang="en-US" sz="1200" dirty="0">
-                        <a:latin typeface="Calibri" charset="0"/>
-                        <a:ea typeface="Calibri" charset="0"/>
-                        <a:cs typeface="Calibri" charset="0"/>
-                      </a:endParaRPr>
-                    </a:p>
-                  </a:txBody>
-                  <a:tcPr anchor="ctr">
-                    <a:lnL w="6350" cap="flat" cmpd="sng" algn="ctr">
-                      <a:solidFill>
-                        <a:srgbClr val="E2E8EC"/>
-                      </a:solidFill>
-                      <a:prstDash val="solid"/>
-                      <a:round/>
-                      <a:headEnd type="none" w="med" len="med"/>
-                      <a:tailEnd type="none" w="med" len="med"/>
-                    </a:lnL>
-                    <a:lnR w="6350" cap="flat" cmpd="sng" algn="ctr">
-                      <a:solidFill>
-                        <a:srgbClr val="E2E8EC"/>
-                      </a:solidFill>
-                      <a:prstDash val="solid"/>
-                      <a:round/>
-                      <a:headEnd type="none" w="med" len="med"/>
-                      <a:tailEnd type="none" w="med" len="med"/>
-                    </a:lnR>
-                    <a:lnT w="6350" cap="flat" cmpd="sng" algn="ctr">
-                      <a:solidFill>
-                        <a:srgbClr val="E2E8EC"/>
-                      </a:solidFill>
-                      <a:prstDash val="solid"/>
-                      <a:round/>
-                      <a:headEnd type="none" w="med" len="med"/>
-                      <a:tailEnd type="none" w="med" len="med"/>
-                    </a:lnT>
-                    <a:lnB w="6350" cap="flat" cmpd="sng" algn="ctr">
-                      <a:solidFill>
-                        <a:srgbClr val="E2E8EC"/>
-                      </a:solidFill>
-                      <a:prstDash val="solid"/>
-                      <a:round/>
-                      <a:headEnd type="none" w="med" len="med"/>
-                      <a:tailEnd type="none" w="med" len="med"/>
-                    </a:lnB>
-                    <a:solidFill>
-                      <a:srgbClr val="FFFFFF"/>
-                    </a:solidFill>
-                  </a:tcPr>
-                </a:tc>
-                <a:tc>
-                  <a:txBody>
-                    <a:bodyPr/>
-                    <a:lstStyle/>
-                    <a:p>
-                      <a:pPr marL="0" indent="0" algn="l">
-                        <a:buNone/>
-                      </a:pPr>
-                      <a:r>
-                        <a:rPr lang="en-US" sz="1200" dirty="0">
-                          <a:solidFill>
-                            <a:srgbClr val="1A1A1A"/>
-                          </a:solidFill>
-                          <a:latin typeface="Calibri" pitchFamily="34" charset="0"/>
-                          <a:ea typeface="Calibri" pitchFamily="34" charset="-122"/>
-                          <a:cs typeface="Calibri" pitchFamily="34" charset="-120"/>
-                        </a:rPr>
-                        <a:t>meteotsunami</a:t>
-                      </a:r>
-                      <a:endParaRPr lang="en-US" sz="1200" dirty="0">
-                        <a:latin typeface="Calibri" charset="0"/>
-                        <a:ea typeface="Calibri" charset="0"/>
-                        <a:cs typeface="Calibri" charset="0"/>
-                      </a:endParaRPr>
-                    </a:p>
-                  </a:txBody>
-                  <a:tcPr anchor="ctr">
-                    <a:lnL w="6350" cap="flat" cmpd="sng" algn="ctr">
-                      <a:solidFill>
-                        <a:srgbClr val="E2E8EC"/>
-                      </a:solidFill>
-                      <a:prstDash val="solid"/>
-                      <a:round/>
-                      <a:headEnd type="none" w="med" len="med"/>
-                      <a:tailEnd type="none" w="med" len="med"/>
-                    </a:lnL>
-                    <a:lnR w="6350" cap="flat" cmpd="sng" algn="ctr">
-                      <a:solidFill>
-                        <a:srgbClr val="E2E8EC"/>
-                      </a:solidFill>
-                      <a:prstDash val="solid"/>
-                      <a:round/>
-                      <a:headEnd type="none" w="med" len="med"/>
-                      <a:tailEnd type="none" w="med" len="med"/>
-                    </a:lnR>
-                    <a:lnT w="6350" cap="flat" cmpd="sng" algn="ctr">
-                      <a:solidFill>
-                        <a:srgbClr val="E2E8EC"/>
-                      </a:solidFill>
-                      <a:prstDash val="solid"/>
-                      <a:round/>
-                      <a:headEnd type="none" w="med" len="med"/>
-                      <a:tailEnd type="none" w="med" len="med"/>
-                    </a:lnT>
-                    <a:lnB w="6350" cap="flat" cmpd="sng" algn="ctr">
-                      <a:solidFill>
-                        <a:srgbClr val="E2E8EC"/>
-                      </a:solidFill>
-                      <a:prstDash val="solid"/>
-                      <a:round/>
-                      <a:headEnd type="none" w="med" len="med"/>
-                      <a:tailEnd type="none" w="med" len="med"/>
-                    </a:lnB>
-                    <a:solidFill>
-                      <a:srgbClr val="FFFFFF"/>
-                    </a:solidFill>
-                  </a:tcPr>
-                </a:tc>
-                <a:tc>
-                  <a:txBody>
-                    <a:bodyPr/>
-                    <a:lstStyle/>
-                    <a:p>
-                      <a:pPr marL="0" indent="0" algn="l">
-                        <a:buNone/>
-                      </a:pPr>
-                      <a:r>
-                        <a:rPr lang="en-US" sz="1200" dirty="0">
-                          <a:solidFill>
-                            <a:srgbClr val="1A1A1A"/>
-                          </a:solidFill>
-                          <a:latin typeface="Calibri" pitchFamily="34" charset="0"/>
-                          <a:ea typeface="Calibri" pitchFamily="34" charset="-122"/>
-                          <a:cs typeface="Calibri" pitchFamily="34" charset="-120"/>
-                        </a:rPr>
-                        <a:t>flooding of the main square of Msida</a:t>
-                      </a:r>
-                      <a:endParaRPr lang="en-US" sz="1200" dirty="0">
-                        <a:latin typeface="Calibri" charset="0"/>
-                        <a:ea typeface="Calibri" charset="0"/>
-                        <a:cs typeface="Calibri" charset="0"/>
-                      </a:endParaRPr>
-                    </a:p>
-                  </a:txBody>
-                  <a:tcPr anchor="ctr">
-                    <a:lnL w="6350" cap="flat" cmpd="sng" algn="ctr">
-                      <a:solidFill>
-                        <a:srgbClr val="E2E8EC"/>
-                      </a:solidFill>
-                      <a:prstDash val="solid"/>
-                      <a:round/>
-                      <a:headEnd type="none" w="med" len="med"/>
-                      <a:tailEnd type="none" w="med" len="med"/>
-                    </a:lnL>
-                    <a:lnR w="6350" cap="flat" cmpd="sng" algn="ctr">
-                      <a:solidFill>
-                        <a:srgbClr val="E2E8EC"/>
-                      </a:solidFill>
-                      <a:prstDash val="solid"/>
-                      <a:round/>
-                      <a:headEnd type="none" w="med" len="med"/>
-                      <a:tailEnd type="none" w="med" len="med"/>
-                    </a:lnR>
-                    <a:lnT w="6350" cap="flat" cmpd="sng" algn="ctr">
-                      <a:solidFill>
-                        <a:srgbClr val="E2E8EC"/>
-                      </a:solidFill>
-                      <a:prstDash val="solid"/>
-                      <a:round/>
-                      <a:headEnd type="none" w="med" len="med"/>
-                      <a:tailEnd type="none" w="med" len="med"/>
-                    </a:lnT>
-                    <a:lnB w="6350" cap="flat" cmpd="sng" algn="ctr">
-                      <a:solidFill>
-                        <a:srgbClr val="E2E8EC"/>
-                      </a:solidFill>
-                      <a:prstDash val="solid"/>
-                      <a:round/>
-                      <a:headEnd type="none" w="med" len="med"/>
-                      <a:tailEnd type="none" w="med" len="med"/>
-                    </a:lnB>
-                    <a:solidFill>
-                      <a:srgbClr val="FFFFFF"/>
-                    </a:solidFill>
-                  </a:tcPr>
-                </a:tc>
-                <a:tc>
-                  <a:txBody>
-                    <a:bodyPr/>
-                    <a:lstStyle/>
-                    <a:p>
-                      <a:pPr marL="0" indent="0" algn="l">
-                        <a:buNone/>
-                      </a:pPr>
-                      <a:r>
-                        <a:rPr lang="en-US" sz="1200" dirty="0">
-                          <a:solidFill>
-                            <a:srgbClr val="1A1A1A"/>
-                          </a:solidFill>
-                          <a:latin typeface="Calibri" pitchFamily="34" charset="0"/>
-                          <a:ea typeface="Calibri" pitchFamily="34" charset="-122"/>
-                          <a:cs typeface="Calibri" pitchFamily="34" charset="-120"/>
-                        </a:rPr>
-                        <a:t>displaced level, not usable</a:t>
-                      </a:r>
-                      <a:endParaRPr lang="en-US" sz="1200" dirty="0">
-                        <a:latin typeface="Calibri" charset="0"/>
-                        <a:ea typeface="Calibri" charset="0"/>
-                        <a:cs typeface="Calibri" charset="0"/>
-                      </a:endParaRPr>
-                    </a:p>
-                  </a:txBody>
-                  <a:tcPr anchor="ctr">
-                    <a:lnL w="6350" cap="flat" cmpd="sng" algn="ctr">
-                      <a:solidFill>
-                        <a:srgbClr val="E2E8EC"/>
-                      </a:solidFill>
-                      <a:prstDash val="solid"/>
-                      <a:round/>
-                      <a:headEnd type="none" w="med" len="med"/>
-                      <a:tailEnd type="none" w="med" len="med"/>
-                    </a:lnL>
-                    <a:lnR w="6350" cap="flat" cmpd="sng" algn="ctr">
-                      <a:solidFill>
-                        <a:srgbClr val="E2E8EC"/>
-                      </a:solidFill>
-                      <a:prstDash val="solid"/>
-                      <a:round/>
-                      <a:headEnd type="none" w="med" len="med"/>
-                      <a:tailEnd type="none" w="med" len="med"/>
-                    </a:lnR>
-                    <a:lnT w="6350" cap="flat" cmpd="sng" algn="ctr">
-                      <a:solidFill>
-                        <a:srgbClr val="E2E8EC"/>
-                      </a:solidFill>
-                      <a:prstDash val="solid"/>
-                      <a:round/>
-                      <a:headEnd type="none" w="med" len="med"/>
-                      <a:tailEnd type="none" w="med" len="med"/>
-                    </a:lnT>
-                    <a:lnB w="6350" cap="flat" cmpd="sng" algn="ctr">
-                      <a:solidFill>
-                        <a:srgbClr val="E2E8EC"/>
-                      </a:solidFill>
-                      <a:prstDash val="solid"/>
-                      <a:round/>
-                      <a:headEnd type="none" w="med" len="med"/>
-                      <a:tailEnd type="none" w="med" len="med"/>
-                    </a:lnB>
-                    <a:solidFill>
-                      <a:srgbClr val="FFFFFF"/>
-                    </a:solidFill>
-                  </a:tcPr>
-                </a:tc>
-                <a:extLst>
-                  <a:ext uri="{0D108BD9-81ED-4DB2-BD59-A6C34878D82A}">
-                    <a16:rowId xmlns:a16="http://schemas.microsoft.com/office/drawing/2014/main" val="10005"/>
-                  </a:ext>
-                </a:extLst>
-              </a:tr>
             </a:tbl>
           </a:graphicData>
         </a:graphic>
       </p:graphicFrame>
       <p:sp>
         <p:nvSpPr>
-          <p:cNvPr id="6" name="Shape 3"/>
+          <p:cNvPr id="7" name="Text 3"/>
+          <p:cNvSpPr txBox="1"/>
+          <p:nvPr/>
+        </p:nvSpPr>
+        <p:spPr>
+          <a:xfrm>
+            <a:off x="7589520" y="4023360"/>
+            <a:ext cx="4032504" cy="640080"/>
+          </a:xfrm>
+          <a:prstGeom prst="rect">
+            <a:avLst/>
+          </a:prstGeom>
+          <a:noFill/>
+          <a:ln/>
+        </p:spPr>
+        <p:txBody>
+          <a:bodyPr wrap="square" lIns="0" tIns="0" rIns="0" bIns="0" rtlCol="0" anchor="t"/>
+          <a:lstStyle/>
+          <a:p>
+            <a:pPr marL="0" indent="0">
+              <a:lnSpc>
+                <a:spcPts val="1400"/>
+              </a:lnSpc>
+              <a:buNone/>
+            </a:pPr>
+            <a:r>
+              <a:rPr lang="en-US" sz="1050" dirty="0">
+                <a:solidFill>
+                  <a:srgbClr val="5F6368"/>
+                </a:solidFill>
+                <a:latin typeface="Calibri" pitchFamily="34" charset="0"/>
+                <a:ea typeface="Calibri" pitchFamily="34" charset="-122"/>
+                <a:cs typeface="Calibri" pitchFamily="34" charset="-120"/>
+              </a:rPr>
+              <a:t>Two earlier events, the seismic tsunami of 25 October 2018 and the milgħuba of 18 June 2019, precede the installation of the gauge in June 2021.</a:t>
+            </a:r>
+            <a:endParaRPr lang="en-US" sz="1050" dirty="0"/>
+          </a:p>
+        </p:txBody>
+      </p:sp>
+      <p:sp>
+        <p:nvSpPr>
+          <p:cNvPr id="6" name="Shape 4"/>
           <p:cNvSpPr/>
           <p:nvPr/>
         </p:nvSpPr>
         <p:spPr>
           <a:xfrm>
-            <a:off x="566928" y="4498848"/>
-            <a:ext cx="5440680" cy="1481328"/>
+            <a:off x="566928" y="4846320"/>
+            <a:ext cx="5440680" cy="1371600"/>
           </a:xfrm>
           <a:prstGeom prst="roundRect">
             <a:avLst>
-              <a:gd name="adj" fmla="val 3704"/>
+              <a:gd name="adj" fmla="val 4000"/>
             </a:avLst>
           </a:prstGeom>
           <a:solidFill>
@@ -10050,13 +9279,13 @@
       </p:sp>
       <p:sp>
         <p:nvSpPr>
-          <p:cNvPr id="7" name="Text 4"/>
+          <p:cNvPr id="9" name="Text 5"/>
           <p:cNvSpPr txBox="1"/>
           <p:nvPr/>
         </p:nvSpPr>
         <p:spPr>
           <a:xfrm>
-            <a:off x="841248" y="4663440"/>
+            <a:off x="841248" y="5010912"/>
             <a:ext cx="4892040" cy="274320"/>
           </a:xfrm>
           <a:prstGeom prst="rect">
@@ -10089,14 +9318,14 @@
       </p:sp>
       <p:sp>
         <p:nvSpPr>
-          <p:cNvPr id="5" name="Text 5"/>
+          <p:cNvPr id="10" name="Text 6"/>
           <p:cNvSpPr txBox="1"/>
           <p:nvPr/>
         </p:nvSpPr>
         <p:spPr>
           <a:xfrm>
-            <a:off x="841248" y="4992624"/>
-            <a:ext cx="4892040" cy="877824"/>
+            <a:off x="841248" y="5340096"/>
+            <a:ext cx="4892040" cy="768096"/>
           </a:xfrm>
           <a:prstGeom prst="rect">
             <a:avLst/>
@@ -10131,18 +9360,18 @@
       </p:sp>
       <p:sp>
         <p:nvSpPr>
-          <p:cNvPr id="9" name="Shape 6"/>
+          <p:cNvPr id="11" name="Shape 7"/>
           <p:cNvSpPr/>
           <p:nvPr/>
         </p:nvSpPr>
         <p:spPr>
           <a:xfrm>
-            <a:off x="6181344" y="4498848"/>
-            <a:ext cx="5440680" cy="1481328"/>
+            <a:off x="6181344" y="4846320"/>
+            <a:ext cx="5440680" cy="1371600"/>
           </a:xfrm>
           <a:prstGeom prst="roundRect">
             <a:avLst>
-              <a:gd name="adj" fmla="val 3704"/>
+              <a:gd name="adj" fmla="val 4000"/>
             </a:avLst>
           </a:prstGeom>
           <a:solidFill>
@@ -10153,13 +9382,13 @@
       </p:sp>
       <p:sp>
         <p:nvSpPr>
-          <p:cNvPr id="10" name="Text 7"/>
+          <p:cNvPr id="12" name="Text 8"/>
           <p:cNvSpPr txBox="1"/>
           <p:nvPr/>
         </p:nvSpPr>
         <p:spPr>
           <a:xfrm>
-            <a:off x="6455664" y="4663440"/>
+            <a:off x="6455664" y="5010912"/>
             <a:ext cx="4892040" cy="274320"/>
           </a:xfrm>
           <a:prstGeom prst="rect">
@@ -10192,14 +9421,14 @@
       </p:sp>
       <p:sp>
         <p:nvSpPr>
-          <p:cNvPr id="11" name="Text 8"/>
+          <p:cNvPr id="13" name="Text 9"/>
           <p:cNvSpPr txBox="1"/>
           <p:nvPr/>
         </p:nvSpPr>
         <p:spPr>
           <a:xfrm>
-            <a:off x="6455664" y="4992624"/>
-            <a:ext cx="4892040" cy="877824"/>
+            <a:off x="6455664" y="5340096"/>
+            <a:ext cx="4892040" cy="768096"/>
           </a:xfrm>
           <a:prstGeom prst="rect">
             <a:avLst/>
@@ -11231,7 +10460,7 @@
           <p:cNvPr id="22" name="Picture 21">
             <a:extLst>
               <a:ext uri="{FF2B5EF4-FFF2-40B4-BE49-F238E27FC236}">
-                <a16:creationId xmlns:a16="http://schemas.microsoft.com/office/drawing/2014/main" id="{FF6310A7-FCDD-B2FC-62E7-C551D608EFE8}"/>
+                <a16:creationId xmlns:a16="http://schemas.microsoft.com/office/drawing/2014/main" id="{75C21F11-6A8E-4464-4360-5A4EE593EBE5}"/>
               </a:ext>
             </a:extLst>
           </p:cNvPr>
@@ -11691,7 +10920,7 @@
                 <a:ea typeface="Calibri" pitchFamily="34" charset="-122"/>
                 <a:cs typeface="Calibri" pitchFamily="34" charset="-120"/>
               </a:rPr>
-              <a:t>Delft3D User Days at Deltares, with the configuration questions.</a:t>
+              <a:t>Delft3D User Days at Deltares.</a:t>
             </a:r>
             <a:endParaRPr lang="en-US" sz="1200" dirty="0"/>
           </a:p>

--- a/docs/valletta_model_concept_2026-10-08_short.pptx
+++ b/docs/valletta_model_concept_2026-10-08_short.pptx
@@ -145,7 +145,7 @@
     </p:spTree>
     <p:extLst>
       <p:ext uri="{BB962C8B-B14F-4D97-AF65-F5344CB8AC3E}">
-        <p14:creationId xmlns:p14="http://schemas.microsoft.com/office/powerpoint/2010/main" val="3900080771"/>
+        <p14:creationId xmlns:p14="http://schemas.microsoft.com/office/powerpoint/2010/main" val="2911507063"/>
       </p:ext>
     </p:extLst>
   </p:cSld>
@@ -322,7 +322,7 @@
     </p:spTree>
     <p:extLst>
       <p:ext uri="{BB962C8B-B14F-4D97-AF65-F5344CB8AC3E}">
-        <p14:creationId xmlns:p14="http://schemas.microsoft.com/office/powerpoint/2010/main" val="483885198"/>
+        <p14:creationId xmlns:p14="http://schemas.microsoft.com/office/powerpoint/2010/main" val="922523325"/>
       </p:ext>
     </p:extLst>
   </p:cSld>
@@ -1740,7 +1740,7 @@
     </p:spTree>
     <p:extLst>
       <p:ext uri="{BB962C8B-B14F-4D97-AF65-F5344CB8AC3E}">
-        <p14:creationId xmlns:p14="http://schemas.microsoft.com/office/powerpoint/2010/main" val="1548432134"/>
+        <p14:creationId xmlns:p14="http://schemas.microsoft.com/office/powerpoint/2010/main" val="3593710515"/>
       </p:ext>
     </p:extLst>
   </p:cSld>
@@ -9455,7 +9455,7 @@
                 <a:ea typeface="Calibri" pitchFamily="34" charset="-122"/>
                 <a:cs typeface="Calibri" pitchFamily="34" charset="-120"/>
               </a:rPr>
-              <a:t>None of the three events since installation is resolved in the public copy. The archive of the group, sea level and one-minute pressure, would therefore be the record against which the response surface is tested.</a:t>
+              <a:t>None of the three events since installation is resolved in the public copy. If available an archive of the group, with sea level and one-minute pressure, would therefore be the record against which the response surface is tested.</a:t>
             </a:r>
             <a:endParaRPr lang="en-US" sz="1150" dirty="0"/>
           </a:p>
@@ -10460,7 +10460,7 @@
           <p:cNvPr id="22" name="Picture 21">
             <a:extLst>
               <a:ext uri="{FF2B5EF4-FFF2-40B4-BE49-F238E27FC236}">
-                <a16:creationId xmlns:a16="http://schemas.microsoft.com/office/drawing/2014/main" id="{75C21F11-6A8E-4464-4360-5A4EE593EBE5}"/>
+                <a16:creationId xmlns:a16="http://schemas.microsoft.com/office/drawing/2014/main" id="{C886FE2E-2348-7203-6194-DF86C7E25D7E}"/>
               </a:ext>
             </a:extLst>
           </p:cNvPr>
